--- a/Pictures/Banner/Banner.pptx
+++ b/Pictures/Banner/Banner.pptx
@@ -2,13 +2,13 @@
 <file path=ppt/presentation.xml><?xml version="1.0" encoding="utf-8"?>
 <p:presentation xmlns:a="http://schemas.openxmlformats.org/drawingml/2006/main" xmlns:r="http://schemas.openxmlformats.org/officeDocument/2006/relationships" xmlns:p="http://schemas.openxmlformats.org/presentationml/2006/main" saveSubsetFonts="1">
   <p:sldMasterIdLst>
-    <p:sldMasterId id="2147483672" r:id="rId1"/>
+    <p:sldMasterId id="2147483804" r:id="rId1"/>
   </p:sldMasterIdLst>
   <p:sldIdLst>
     <p:sldId id="256" r:id="rId2"/>
   </p:sldIdLst>
-  <p:sldSz cx="12960350" cy="2160588"/>
-  <p:notesSz cx="6858000" cy="9144000"/>
+  <p:sldSz cx="19799300" cy="3600450"/>
+  <p:notesSz cx="9144000" cy="6858000"/>
   <p:defaultTextStyle>
     <a:defPPr>
       <a:defRPr lang="en-US"/>
@@ -115,13 +115,367 @@
 <file path=ppt/revisionInfo.xml><?xml version="1.0" encoding="utf-8"?>
 <p1510:revInfo xmlns:a="http://schemas.openxmlformats.org/drawingml/2006/main" xmlns:r="http://schemas.openxmlformats.org/officeDocument/2006/relationships" xmlns:p1510="http://schemas.microsoft.com/office/powerpoint/2015/10/main">
   <p1510:revLst>
-    <p1510:client id="{3AC723FB-6222-4CC1-B634-21668C86D7B8}" v="2145" dt="2023-09-28T20:55:04.711"/>
+    <p1510:client id="{62D9E2F5-19B7-46BC-89A8-B3A73B312D98}" v="19" dt="2024-03-19T16:55:23.941"/>
   </p1510:revLst>
 </p1510:revInfo>
 </file>
 
 <file path=ppt/changesInfos/changesInfo1.xml><?xml version="1.0" encoding="utf-8"?>
 <pc:chgInfo xmlns:a="http://schemas.openxmlformats.org/drawingml/2006/main" xmlns:r="http://schemas.openxmlformats.org/officeDocument/2006/relationships" xmlns:ac="http://schemas.microsoft.com/office/drawing/2013/main/command" xmlns:pc="http://schemas.microsoft.com/office/powerpoint/2013/main/command">
+  <pc:docChgLst>
+    <pc:chgData name="Ben Parsons" userId="20614aba6f228070" providerId="LiveId" clId="{62D9E2F5-19B7-46BC-89A8-B3A73B312D98}"/>
+    <pc:docChg chg="undo custSel modSld modMainMaster">
+      <pc:chgData name="Ben Parsons" userId="20614aba6f228070" providerId="LiveId" clId="{62D9E2F5-19B7-46BC-89A8-B3A73B312D98}" dt="2024-03-19T16:55:13.276" v="378"/>
+      <pc:docMkLst>
+        <pc:docMk/>
+      </pc:docMkLst>
+      <pc:sldChg chg="addSp delSp modSp mod">
+        <pc:chgData name="Ben Parsons" userId="20614aba6f228070" providerId="LiveId" clId="{62D9E2F5-19B7-46BC-89A8-B3A73B312D98}" dt="2024-03-19T16:55:13.276" v="378"/>
+        <pc:sldMkLst>
+          <pc:docMk/>
+          <pc:sldMk cId="2874743813" sldId="256"/>
+        </pc:sldMkLst>
+        <pc:grpChg chg="add del mod">
+          <ac:chgData name="Ben Parsons" userId="20614aba6f228070" providerId="LiveId" clId="{62D9E2F5-19B7-46BC-89A8-B3A73B312D98}" dt="2024-03-19T16:16:47.096" v="339" actId="165"/>
+          <ac:grpSpMkLst>
+            <pc:docMk/>
+            <pc:sldMk cId="2874743813" sldId="256"/>
+            <ac:grpSpMk id="5" creationId="{1CA25DB4-69ED-C4C3-575D-2144D1041D45}"/>
+          </ac:grpSpMkLst>
+        </pc:grpChg>
+        <pc:grpChg chg="add del mod">
+          <ac:chgData name="Ben Parsons" userId="20614aba6f228070" providerId="LiveId" clId="{62D9E2F5-19B7-46BC-89A8-B3A73B312D98}" dt="2024-03-19T16:15:30.712" v="324" actId="165"/>
+          <ac:grpSpMkLst>
+            <pc:docMk/>
+            <pc:sldMk cId="2874743813" sldId="256"/>
+            <ac:grpSpMk id="6" creationId="{3B11D473-7C9A-6ECE-D769-BB25003B5D05}"/>
+          </ac:grpSpMkLst>
+        </pc:grpChg>
+        <pc:picChg chg="mod">
+          <ac:chgData name="Ben Parsons" userId="20614aba6f228070" providerId="LiveId" clId="{62D9E2F5-19B7-46BC-89A8-B3A73B312D98}" dt="2024-03-19T16:55:13.276" v="378"/>
+          <ac:picMkLst>
+            <pc:docMk/>
+            <pc:sldMk cId="2874743813" sldId="256"/>
+            <ac:picMk id="3" creationId="{7FA40DBD-23EF-6739-D390-39D75C14FCFA}"/>
+          </ac:picMkLst>
+        </pc:picChg>
+        <pc:picChg chg="add mod topLvl">
+          <ac:chgData name="Ben Parsons" userId="20614aba6f228070" providerId="LiveId" clId="{62D9E2F5-19B7-46BC-89A8-B3A73B312D98}" dt="2024-03-19T16:55:13.276" v="378"/>
+          <ac:picMkLst>
+            <pc:docMk/>
+            <pc:sldMk cId="2874743813" sldId="256"/>
+            <ac:picMk id="4" creationId="{82090C12-165B-0C0B-79DA-148E5E7E1C95}"/>
+          </ac:picMkLst>
+        </pc:picChg>
+        <pc:picChg chg="mod topLvl modCrop">
+          <ac:chgData name="Ben Parsons" userId="20614aba6f228070" providerId="LiveId" clId="{62D9E2F5-19B7-46BC-89A8-B3A73B312D98}" dt="2024-03-19T16:55:13.276" v="378"/>
+          <ac:picMkLst>
+            <pc:docMk/>
+            <pc:sldMk cId="2874743813" sldId="256"/>
+            <ac:picMk id="7" creationId="{ED5288AE-B4D1-79B9-5DD6-D0C8E6C0F158}"/>
+          </ac:picMkLst>
+        </pc:picChg>
+        <pc:picChg chg="mod topLvl">
+          <ac:chgData name="Ben Parsons" userId="20614aba6f228070" providerId="LiveId" clId="{62D9E2F5-19B7-46BC-89A8-B3A73B312D98}" dt="2024-03-19T16:55:13.276" v="378"/>
+          <ac:picMkLst>
+            <pc:docMk/>
+            <pc:sldMk cId="2874743813" sldId="256"/>
+            <ac:picMk id="1026" creationId="{484F419A-AAA8-BDB5-3106-DE37B6E29DDE}"/>
+          </ac:picMkLst>
+        </pc:picChg>
+        <pc:picChg chg="mod topLvl">
+          <ac:chgData name="Ben Parsons" userId="20614aba6f228070" providerId="LiveId" clId="{62D9E2F5-19B7-46BC-89A8-B3A73B312D98}" dt="2024-03-19T16:55:13.276" v="378"/>
+          <ac:picMkLst>
+            <pc:docMk/>
+            <pc:sldMk cId="2874743813" sldId="256"/>
+            <ac:picMk id="1034" creationId="{2AE8F74B-13E3-0D7C-B50A-CA322BEB6858}"/>
+          </ac:picMkLst>
+        </pc:picChg>
+        <pc:picChg chg="add del mod">
+          <ac:chgData name="Ben Parsons" userId="20614aba6f228070" providerId="LiveId" clId="{62D9E2F5-19B7-46BC-89A8-B3A73B312D98}" dt="2024-03-19T15:48:46.384" v="118" actId="478"/>
+          <ac:picMkLst>
+            <pc:docMk/>
+            <pc:sldMk cId="2874743813" sldId="256"/>
+            <ac:picMk id="1036" creationId="{81B421AB-941E-2E88-CE86-B049DCF8460C}"/>
+          </ac:picMkLst>
+        </pc:picChg>
+      </pc:sldChg>
+      <pc:sldMasterChg chg="modSp modSldLayout">
+        <pc:chgData name="Ben Parsons" userId="20614aba6f228070" providerId="LiveId" clId="{62D9E2F5-19B7-46BC-89A8-B3A73B312D98}" dt="2024-03-19T16:55:13.276" v="378"/>
+        <pc:sldMasterMkLst>
+          <pc:docMk/>
+          <pc:sldMasterMk cId="3682029900" sldId="2147483792"/>
+        </pc:sldMasterMkLst>
+        <pc:spChg chg="mod">
+          <ac:chgData name="Ben Parsons" userId="20614aba6f228070" providerId="LiveId" clId="{62D9E2F5-19B7-46BC-89A8-B3A73B312D98}" dt="2024-03-19T16:55:13.276" v="378"/>
+          <ac:spMkLst>
+            <pc:docMk/>
+            <pc:sldMasterMk cId="3682029900" sldId="2147483792"/>
+            <ac:spMk id="2" creationId="{00000000-0000-0000-0000-000000000000}"/>
+          </ac:spMkLst>
+        </pc:spChg>
+        <pc:spChg chg="mod">
+          <ac:chgData name="Ben Parsons" userId="20614aba6f228070" providerId="LiveId" clId="{62D9E2F5-19B7-46BC-89A8-B3A73B312D98}" dt="2024-03-19T16:55:13.276" v="378"/>
+          <ac:spMkLst>
+            <pc:docMk/>
+            <pc:sldMasterMk cId="3682029900" sldId="2147483792"/>
+            <ac:spMk id="3" creationId="{00000000-0000-0000-0000-000000000000}"/>
+          </ac:spMkLst>
+        </pc:spChg>
+        <pc:spChg chg="mod">
+          <ac:chgData name="Ben Parsons" userId="20614aba6f228070" providerId="LiveId" clId="{62D9E2F5-19B7-46BC-89A8-B3A73B312D98}" dt="2024-03-19T16:55:13.276" v="378"/>
+          <ac:spMkLst>
+            <pc:docMk/>
+            <pc:sldMasterMk cId="3682029900" sldId="2147483792"/>
+            <ac:spMk id="4" creationId="{00000000-0000-0000-0000-000000000000}"/>
+          </ac:spMkLst>
+        </pc:spChg>
+        <pc:spChg chg="mod">
+          <ac:chgData name="Ben Parsons" userId="20614aba6f228070" providerId="LiveId" clId="{62D9E2F5-19B7-46BC-89A8-B3A73B312D98}" dt="2024-03-19T16:55:13.276" v="378"/>
+          <ac:spMkLst>
+            <pc:docMk/>
+            <pc:sldMasterMk cId="3682029900" sldId="2147483792"/>
+            <ac:spMk id="5" creationId="{00000000-0000-0000-0000-000000000000}"/>
+          </ac:spMkLst>
+        </pc:spChg>
+        <pc:spChg chg="mod">
+          <ac:chgData name="Ben Parsons" userId="20614aba6f228070" providerId="LiveId" clId="{62D9E2F5-19B7-46BC-89A8-B3A73B312D98}" dt="2024-03-19T16:55:13.276" v="378"/>
+          <ac:spMkLst>
+            <pc:docMk/>
+            <pc:sldMasterMk cId="3682029900" sldId="2147483792"/>
+            <ac:spMk id="6" creationId="{00000000-0000-0000-0000-000000000000}"/>
+          </ac:spMkLst>
+        </pc:spChg>
+        <pc:sldLayoutChg chg="modSp">
+          <pc:chgData name="Ben Parsons" userId="20614aba6f228070" providerId="LiveId" clId="{62D9E2F5-19B7-46BC-89A8-B3A73B312D98}" dt="2024-03-19T16:55:13.276" v="378"/>
+          <pc:sldLayoutMkLst>
+            <pc:docMk/>
+            <pc:sldMasterMk cId="3682029900" sldId="2147483792"/>
+            <pc:sldLayoutMk cId="1074553415" sldId="2147483793"/>
+          </pc:sldLayoutMkLst>
+          <pc:spChg chg="mod">
+            <ac:chgData name="Ben Parsons" userId="20614aba6f228070" providerId="LiveId" clId="{62D9E2F5-19B7-46BC-89A8-B3A73B312D98}" dt="2024-03-19T16:55:13.276" v="378"/>
+            <ac:spMkLst>
+              <pc:docMk/>
+              <pc:sldMasterMk cId="3682029900" sldId="2147483792"/>
+              <pc:sldLayoutMk cId="1074553415" sldId="2147483793"/>
+              <ac:spMk id="2" creationId="{00000000-0000-0000-0000-000000000000}"/>
+            </ac:spMkLst>
+          </pc:spChg>
+          <pc:spChg chg="mod">
+            <ac:chgData name="Ben Parsons" userId="20614aba6f228070" providerId="LiveId" clId="{62D9E2F5-19B7-46BC-89A8-B3A73B312D98}" dt="2024-03-19T16:55:13.276" v="378"/>
+            <ac:spMkLst>
+              <pc:docMk/>
+              <pc:sldMasterMk cId="3682029900" sldId="2147483792"/>
+              <pc:sldLayoutMk cId="1074553415" sldId="2147483793"/>
+              <ac:spMk id="3" creationId="{00000000-0000-0000-0000-000000000000}"/>
+            </ac:spMkLst>
+          </pc:spChg>
+        </pc:sldLayoutChg>
+        <pc:sldLayoutChg chg="modSp">
+          <pc:chgData name="Ben Parsons" userId="20614aba6f228070" providerId="LiveId" clId="{62D9E2F5-19B7-46BC-89A8-B3A73B312D98}" dt="2024-03-19T16:55:13.276" v="378"/>
+          <pc:sldLayoutMkLst>
+            <pc:docMk/>
+            <pc:sldMasterMk cId="3682029900" sldId="2147483792"/>
+            <pc:sldLayoutMk cId="3517215975" sldId="2147483795"/>
+          </pc:sldLayoutMkLst>
+          <pc:spChg chg="mod">
+            <ac:chgData name="Ben Parsons" userId="20614aba6f228070" providerId="LiveId" clId="{62D9E2F5-19B7-46BC-89A8-B3A73B312D98}" dt="2024-03-19T16:55:13.276" v="378"/>
+            <ac:spMkLst>
+              <pc:docMk/>
+              <pc:sldMasterMk cId="3682029900" sldId="2147483792"/>
+              <pc:sldLayoutMk cId="3517215975" sldId="2147483795"/>
+              <ac:spMk id="2" creationId="{00000000-0000-0000-0000-000000000000}"/>
+            </ac:spMkLst>
+          </pc:spChg>
+          <pc:spChg chg="mod">
+            <ac:chgData name="Ben Parsons" userId="20614aba6f228070" providerId="LiveId" clId="{62D9E2F5-19B7-46BC-89A8-B3A73B312D98}" dt="2024-03-19T16:55:13.276" v="378"/>
+            <ac:spMkLst>
+              <pc:docMk/>
+              <pc:sldMasterMk cId="3682029900" sldId="2147483792"/>
+              <pc:sldLayoutMk cId="3517215975" sldId="2147483795"/>
+              <ac:spMk id="3" creationId="{00000000-0000-0000-0000-000000000000}"/>
+            </ac:spMkLst>
+          </pc:spChg>
+        </pc:sldLayoutChg>
+        <pc:sldLayoutChg chg="modSp">
+          <pc:chgData name="Ben Parsons" userId="20614aba6f228070" providerId="LiveId" clId="{62D9E2F5-19B7-46BC-89A8-B3A73B312D98}" dt="2024-03-19T16:55:13.276" v="378"/>
+          <pc:sldLayoutMkLst>
+            <pc:docMk/>
+            <pc:sldMasterMk cId="3682029900" sldId="2147483792"/>
+            <pc:sldLayoutMk cId="3275148898" sldId="2147483796"/>
+          </pc:sldLayoutMkLst>
+          <pc:spChg chg="mod">
+            <ac:chgData name="Ben Parsons" userId="20614aba6f228070" providerId="LiveId" clId="{62D9E2F5-19B7-46BC-89A8-B3A73B312D98}" dt="2024-03-19T16:55:13.276" v="378"/>
+            <ac:spMkLst>
+              <pc:docMk/>
+              <pc:sldMasterMk cId="3682029900" sldId="2147483792"/>
+              <pc:sldLayoutMk cId="3275148898" sldId="2147483796"/>
+              <ac:spMk id="3" creationId="{00000000-0000-0000-0000-000000000000}"/>
+            </ac:spMkLst>
+          </pc:spChg>
+          <pc:spChg chg="mod">
+            <ac:chgData name="Ben Parsons" userId="20614aba6f228070" providerId="LiveId" clId="{62D9E2F5-19B7-46BC-89A8-B3A73B312D98}" dt="2024-03-19T16:55:13.276" v="378"/>
+            <ac:spMkLst>
+              <pc:docMk/>
+              <pc:sldMasterMk cId="3682029900" sldId="2147483792"/>
+              <pc:sldLayoutMk cId="3275148898" sldId="2147483796"/>
+              <ac:spMk id="4" creationId="{00000000-0000-0000-0000-000000000000}"/>
+            </ac:spMkLst>
+          </pc:spChg>
+        </pc:sldLayoutChg>
+        <pc:sldLayoutChg chg="modSp">
+          <pc:chgData name="Ben Parsons" userId="20614aba6f228070" providerId="LiveId" clId="{62D9E2F5-19B7-46BC-89A8-B3A73B312D98}" dt="2024-03-19T16:55:13.276" v="378"/>
+          <pc:sldLayoutMkLst>
+            <pc:docMk/>
+            <pc:sldMasterMk cId="3682029900" sldId="2147483792"/>
+            <pc:sldLayoutMk cId="1691604604" sldId="2147483797"/>
+          </pc:sldLayoutMkLst>
+          <pc:spChg chg="mod">
+            <ac:chgData name="Ben Parsons" userId="20614aba6f228070" providerId="LiveId" clId="{62D9E2F5-19B7-46BC-89A8-B3A73B312D98}" dt="2024-03-19T16:55:13.276" v="378"/>
+            <ac:spMkLst>
+              <pc:docMk/>
+              <pc:sldMasterMk cId="3682029900" sldId="2147483792"/>
+              <pc:sldLayoutMk cId="1691604604" sldId="2147483797"/>
+              <ac:spMk id="2" creationId="{00000000-0000-0000-0000-000000000000}"/>
+            </ac:spMkLst>
+          </pc:spChg>
+          <pc:spChg chg="mod">
+            <ac:chgData name="Ben Parsons" userId="20614aba6f228070" providerId="LiveId" clId="{62D9E2F5-19B7-46BC-89A8-B3A73B312D98}" dt="2024-03-19T16:55:13.276" v="378"/>
+            <ac:spMkLst>
+              <pc:docMk/>
+              <pc:sldMasterMk cId="3682029900" sldId="2147483792"/>
+              <pc:sldLayoutMk cId="1691604604" sldId="2147483797"/>
+              <ac:spMk id="3" creationId="{00000000-0000-0000-0000-000000000000}"/>
+            </ac:spMkLst>
+          </pc:spChg>
+          <pc:spChg chg="mod">
+            <ac:chgData name="Ben Parsons" userId="20614aba6f228070" providerId="LiveId" clId="{62D9E2F5-19B7-46BC-89A8-B3A73B312D98}" dt="2024-03-19T16:55:13.276" v="378"/>
+            <ac:spMkLst>
+              <pc:docMk/>
+              <pc:sldMasterMk cId="3682029900" sldId="2147483792"/>
+              <pc:sldLayoutMk cId="1691604604" sldId="2147483797"/>
+              <ac:spMk id="4" creationId="{00000000-0000-0000-0000-000000000000}"/>
+            </ac:spMkLst>
+          </pc:spChg>
+          <pc:spChg chg="mod">
+            <ac:chgData name="Ben Parsons" userId="20614aba6f228070" providerId="LiveId" clId="{62D9E2F5-19B7-46BC-89A8-B3A73B312D98}" dt="2024-03-19T16:55:13.276" v="378"/>
+            <ac:spMkLst>
+              <pc:docMk/>
+              <pc:sldMasterMk cId="3682029900" sldId="2147483792"/>
+              <pc:sldLayoutMk cId="1691604604" sldId="2147483797"/>
+              <ac:spMk id="5" creationId="{00000000-0000-0000-0000-000000000000}"/>
+            </ac:spMkLst>
+          </pc:spChg>
+          <pc:spChg chg="mod">
+            <ac:chgData name="Ben Parsons" userId="20614aba6f228070" providerId="LiveId" clId="{62D9E2F5-19B7-46BC-89A8-B3A73B312D98}" dt="2024-03-19T16:55:13.276" v="378"/>
+            <ac:spMkLst>
+              <pc:docMk/>
+              <pc:sldMasterMk cId="3682029900" sldId="2147483792"/>
+              <pc:sldLayoutMk cId="1691604604" sldId="2147483797"/>
+              <ac:spMk id="6" creationId="{00000000-0000-0000-0000-000000000000}"/>
+            </ac:spMkLst>
+          </pc:spChg>
+        </pc:sldLayoutChg>
+        <pc:sldLayoutChg chg="modSp">
+          <pc:chgData name="Ben Parsons" userId="20614aba6f228070" providerId="LiveId" clId="{62D9E2F5-19B7-46BC-89A8-B3A73B312D98}" dt="2024-03-19T16:55:13.276" v="378"/>
+          <pc:sldLayoutMkLst>
+            <pc:docMk/>
+            <pc:sldMasterMk cId="3682029900" sldId="2147483792"/>
+            <pc:sldLayoutMk cId="4278679275" sldId="2147483800"/>
+          </pc:sldLayoutMkLst>
+          <pc:spChg chg="mod">
+            <ac:chgData name="Ben Parsons" userId="20614aba6f228070" providerId="LiveId" clId="{62D9E2F5-19B7-46BC-89A8-B3A73B312D98}" dt="2024-03-19T16:55:13.276" v="378"/>
+            <ac:spMkLst>
+              <pc:docMk/>
+              <pc:sldMasterMk cId="3682029900" sldId="2147483792"/>
+              <pc:sldLayoutMk cId="4278679275" sldId="2147483800"/>
+              <ac:spMk id="2" creationId="{00000000-0000-0000-0000-000000000000}"/>
+            </ac:spMkLst>
+          </pc:spChg>
+          <pc:spChg chg="mod">
+            <ac:chgData name="Ben Parsons" userId="20614aba6f228070" providerId="LiveId" clId="{62D9E2F5-19B7-46BC-89A8-B3A73B312D98}" dt="2024-03-19T16:55:13.276" v="378"/>
+            <ac:spMkLst>
+              <pc:docMk/>
+              <pc:sldMasterMk cId="3682029900" sldId="2147483792"/>
+              <pc:sldLayoutMk cId="4278679275" sldId="2147483800"/>
+              <ac:spMk id="3" creationId="{00000000-0000-0000-0000-000000000000}"/>
+            </ac:spMkLst>
+          </pc:spChg>
+          <pc:spChg chg="mod">
+            <ac:chgData name="Ben Parsons" userId="20614aba6f228070" providerId="LiveId" clId="{62D9E2F5-19B7-46BC-89A8-B3A73B312D98}" dt="2024-03-19T16:55:13.276" v="378"/>
+            <ac:spMkLst>
+              <pc:docMk/>
+              <pc:sldMasterMk cId="3682029900" sldId="2147483792"/>
+              <pc:sldLayoutMk cId="4278679275" sldId="2147483800"/>
+              <ac:spMk id="4" creationId="{00000000-0000-0000-0000-000000000000}"/>
+            </ac:spMkLst>
+          </pc:spChg>
+        </pc:sldLayoutChg>
+        <pc:sldLayoutChg chg="modSp">
+          <pc:chgData name="Ben Parsons" userId="20614aba6f228070" providerId="LiveId" clId="{62D9E2F5-19B7-46BC-89A8-B3A73B312D98}" dt="2024-03-19T16:55:13.276" v="378"/>
+          <pc:sldLayoutMkLst>
+            <pc:docMk/>
+            <pc:sldMasterMk cId="3682029900" sldId="2147483792"/>
+            <pc:sldLayoutMk cId="127600810" sldId="2147483801"/>
+          </pc:sldLayoutMkLst>
+          <pc:spChg chg="mod">
+            <ac:chgData name="Ben Parsons" userId="20614aba6f228070" providerId="LiveId" clId="{62D9E2F5-19B7-46BC-89A8-B3A73B312D98}" dt="2024-03-19T16:55:13.276" v="378"/>
+            <ac:spMkLst>
+              <pc:docMk/>
+              <pc:sldMasterMk cId="3682029900" sldId="2147483792"/>
+              <pc:sldLayoutMk cId="127600810" sldId="2147483801"/>
+              <ac:spMk id="2" creationId="{00000000-0000-0000-0000-000000000000}"/>
+            </ac:spMkLst>
+          </pc:spChg>
+          <pc:spChg chg="mod">
+            <ac:chgData name="Ben Parsons" userId="20614aba6f228070" providerId="LiveId" clId="{62D9E2F5-19B7-46BC-89A8-B3A73B312D98}" dt="2024-03-19T16:55:13.276" v="378"/>
+            <ac:spMkLst>
+              <pc:docMk/>
+              <pc:sldMasterMk cId="3682029900" sldId="2147483792"/>
+              <pc:sldLayoutMk cId="127600810" sldId="2147483801"/>
+              <ac:spMk id="3" creationId="{00000000-0000-0000-0000-000000000000}"/>
+            </ac:spMkLst>
+          </pc:spChg>
+          <pc:spChg chg="mod">
+            <ac:chgData name="Ben Parsons" userId="20614aba6f228070" providerId="LiveId" clId="{62D9E2F5-19B7-46BC-89A8-B3A73B312D98}" dt="2024-03-19T16:55:13.276" v="378"/>
+            <ac:spMkLst>
+              <pc:docMk/>
+              <pc:sldMasterMk cId="3682029900" sldId="2147483792"/>
+              <pc:sldLayoutMk cId="127600810" sldId="2147483801"/>
+              <ac:spMk id="4" creationId="{00000000-0000-0000-0000-000000000000}"/>
+            </ac:spMkLst>
+          </pc:spChg>
+        </pc:sldLayoutChg>
+        <pc:sldLayoutChg chg="modSp">
+          <pc:chgData name="Ben Parsons" userId="20614aba6f228070" providerId="LiveId" clId="{62D9E2F5-19B7-46BC-89A8-B3A73B312D98}" dt="2024-03-19T16:55:13.276" v="378"/>
+          <pc:sldLayoutMkLst>
+            <pc:docMk/>
+            <pc:sldMasterMk cId="3682029900" sldId="2147483792"/>
+            <pc:sldLayoutMk cId="2307309673" sldId="2147483803"/>
+          </pc:sldLayoutMkLst>
+          <pc:spChg chg="mod">
+            <ac:chgData name="Ben Parsons" userId="20614aba6f228070" providerId="LiveId" clId="{62D9E2F5-19B7-46BC-89A8-B3A73B312D98}" dt="2024-03-19T16:55:13.276" v="378"/>
+            <ac:spMkLst>
+              <pc:docMk/>
+              <pc:sldMasterMk cId="3682029900" sldId="2147483792"/>
+              <pc:sldLayoutMk cId="2307309673" sldId="2147483803"/>
+              <ac:spMk id="2" creationId="{00000000-0000-0000-0000-000000000000}"/>
+            </ac:spMkLst>
+          </pc:spChg>
+          <pc:spChg chg="mod">
+            <ac:chgData name="Ben Parsons" userId="20614aba6f228070" providerId="LiveId" clId="{62D9E2F5-19B7-46BC-89A8-B3A73B312D98}" dt="2024-03-19T16:55:13.276" v="378"/>
+            <ac:spMkLst>
+              <pc:docMk/>
+              <pc:sldMasterMk cId="3682029900" sldId="2147483792"/>
+              <pc:sldLayoutMk cId="2307309673" sldId="2147483803"/>
+              <ac:spMk id="3" creationId="{00000000-0000-0000-0000-000000000000}"/>
+            </ac:spMkLst>
+          </pc:spChg>
+        </pc:sldLayoutChg>
+      </pc:sldMasterChg>
+    </pc:docChg>
+  </pc:docChgLst>
   <pc:docChgLst>
     <pc:chgData name="Kristina Parsons" userId="2637c8b9ee0f7ded" providerId="LiveId" clId="{3AC723FB-6222-4CC1-B634-21668C86D7B8}"/>
     <pc:docChg chg="undo custSel modSld modMainMaster">
@@ -337,20 +691,20 @@
         </p:nvSpPr>
         <p:spPr>
           <a:xfrm>
-            <a:off x="1620044" y="353596"/>
-            <a:ext cx="9720263" cy="752205"/>
+            <a:off x="2474913" y="589241"/>
+            <a:ext cx="14849475" cy="1253490"/>
           </a:xfrm>
         </p:spPr>
         <p:txBody>
           <a:bodyPr anchor="b"/>
           <a:lstStyle>
             <a:lvl1pPr algn="ctr">
-              <a:defRPr sz="1890"/>
+              <a:defRPr sz="3150"/>
             </a:lvl1pPr>
           </a:lstStyle>
           <a:p>
             <a:r>
-              <a:rPr lang="en-US"/>
+              <a:rPr lang="en-GB"/>
               <a:t>Click to edit Master title style</a:t>
             </a:r>
             <a:endParaRPr lang="en-US" dirty="0"/>
@@ -369,8 +723,8 @@
         </p:nvSpPr>
         <p:spPr>
           <a:xfrm>
-            <a:off x="1620044" y="1134809"/>
-            <a:ext cx="9720263" cy="521642"/>
+            <a:off x="2474913" y="1891070"/>
+            <a:ext cx="14849475" cy="869275"/>
           </a:xfrm>
         </p:spPr>
         <p:txBody>
@@ -378,44 +732,44 @@
           <a:lstStyle>
             <a:lvl1pPr marL="0" indent="0" algn="ctr">
               <a:buNone/>
-              <a:defRPr sz="756"/>
+              <a:defRPr sz="1260"/>
             </a:lvl1pPr>
-            <a:lvl2pPr marL="144018" indent="0" algn="ctr">
-              <a:buNone/>
-              <a:defRPr sz="630"/>
+            <a:lvl2pPr marL="240030" indent="0" algn="ctr">
+              <a:buNone/>
+              <a:defRPr sz="1050"/>
             </a:lvl2pPr>
-            <a:lvl3pPr marL="288036" indent="0" algn="ctr">
-              <a:buNone/>
-              <a:defRPr sz="567"/>
+            <a:lvl3pPr marL="480060" indent="0" algn="ctr">
+              <a:buNone/>
+              <a:defRPr sz="945"/>
             </a:lvl3pPr>
-            <a:lvl4pPr marL="432054" indent="0" algn="ctr">
-              <a:buNone/>
-              <a:defRPr sz="504"/>
+            <a:lvl4pPr marL="720090" indent="0" algn="ctr">
+              <a:buNone/>
+              <a:defRPr sz="840"/>
             </a:lvl4pPr>
-            <a:lvl5pPr marL="576072" indent="0" algn="ctr">
-              <a:buNone/>
-              <a:defRPr sz="504"/>
+            <a:lvl5pPr marL="960120" indent="0" algn="ctr">
+              <a:buNone/>
+              <a:defRPr sz="840"/>
             </a:lvl5pPr>
-            <a:lvl6pPr marL="720090" indent="0" algn="ctr">
-              <a:buNone/>
-              <a:defRPr sz="504"/>
+            <a:lvl6pPr marL="1200150" indent="0" algn="ctr">
+              <a:buNone/>
+              <a:defRPr sz="840"/>
             </a:lvl6pPr>
-            <a:lvl7pPr marL="864108" indent="0" algn="ctr">
-              <a:buNone/>
-              <a:defRPr sz="504"/>
+            <a:lvl7pPr marL="1440180" indent="0" algn="ctr">
+              <a:buNone/>
+              <a:defRPr sz="840"/>
             </a:lvl7pPr>
-            <a:lvl8pPr marL="1008126" indent="0" algn="ctr">
-              <a:buNone/>
-              <a:defRPr sz="504"/>
+            <a:lvl8pPr marL="1680210" indent="0" algn="ctr">
+              <a:buNone/>
+              <a:defRPr sz="840"/>
             </a:lvl8pPr>
-            <a:lvl9pPr marL="1152144" indent="0" algn="ctr">
-              <a:buNone/>
-              <a:defRPr sz="504"/>
+            <a:lvl9pPr marL="1920240" indent="0" algn="ctr">
+              <a:buNone/>
+              <a:defRPr sz="840"/>
             </a:lvl9pPr>
           </a:lstStyle>
           <a:p>
             <a:r>
-              <a:rPr lang="en-US"/>
+              <a:rPr lang="en-GB"/>
               <a:t>Click to edit Master subtitle style</a:t>
             </a:r>
             <a:endParaRPr lang="en-US" dirty="0"/>
@@ -439,7 +793,7 @@
           <a:p>
             <a:fld id="{BAE14841-EB75-4F4F-9DE8-73B3A903F4E0}" type="datetimeFigureOut">
               <a:rPr lang="en-GB" smtClean="0"/>
-              <a:t>28/09/2023</a:t>
+              <a:t>19/03/2024</a:t>
             </a:fld>
             <a:endParaRPr lang="en-GB"/>
           </a:p>
@@ -490,7 +844,7 @@
     </p:spTree>
     <p:extLst>
       <p:ext uri="{BB962C8B-B14F-4D97-AF65-F5344CB8AC3E}">
-        <p14:creationId xmlns:p14="http://schemas.microsoft.com/office/powerpoint/2010/main" val="3800207444"/>
+        <p14:creationId xmlns:p14="http://schemas.microsoft.com/office/powerpoint/2010/main" val="3852758218"/>
       </p:ext>
     </p:extLst>
   </p:cSld>
@@ -533,7 +887,7 @@
           <a:lstStyle/>
           <a:p>
             <a:r>
-              <a:rPr lang="en-US"/>
+              <a:rPr lang="en-GB"/>
               <a:t>Click to edit Master title style</a:t>
             </a:r>
             <a:endParaRPr lang="en-US" dirty="0"/>
@@ -557,35 +911,35 @@
           <a:p>
             <a:pPr lvl="0"/>
             <a:r>
-              <a:rPr lang="en-US"/>
+              <a:rPr lang="en-GB"/>
               <a:t>Click to edit Master text styles</a:t>
             </a:r>
           </a:p>
           <a:p>
             <a:pPr lvl="1"/>
             <a:r>
-              <a:rPr lang="en-US"/>
+              <a:rPr lang="en-GB"/>
               <a:t>Second level</a:t>
             </a:r>
           </a:p>
           <a:p>
             <a:pPr lvl="2"/>
             <a:r>
-              <a:rPr lang="en-US"/>
+              <a:rPr lang="en-GB"/>
               <a:t>Third level</a:t>
             </a:r>
           </a:p>
           <a:p>
             <a:pPr lvl="3"/>
             <a:r>
-              <a:rPr lang="en-US"/>
+              <a:rPr lang="en-GB"/>
               <a:t>Fourth level</a:t>
             </a:r>
           </a:p>
           <a:p>
             <a:pPr lvl="4"/>
             <a:r>
-              <a:rPr lang="en-US"/>
+              <a:rPr lang="en-GB"/>
               <a:t>Fifth level</a:t>
             </a:r>
             <a:endParaRPr lang="en-US" dirty="0"/>
@@ -609,7 +963,7 @@
           <a:p>
             <a:fld id="{BAE14841-EB75-4F4F-9DE8-73B3A903F4E0}" type="datetimeFigureOut">
               <a:rPr lang="en-GB" smtClean="0"/>
-              <a:t>28/09/2023</a:t>
+              <a:t>19/03/2024</a:t>
             </a:fld>
             <a:endParaRPr lang="en-GB"/>
           </a:p>
@@ -660,7 +1014,7 @@
     </p:spTree>
     <p:extLst>
       <p:ext uri="{BB962C8B-B14F-4D97-AF65-F5344CB8AC3E}">
-        <p14:creationId xmlns:p14="http://schemas.microsoft.com/office/powerpoint/2010/main" val="3400110475"/>
+        <p14:creationId xmlns:p14="http://schemas.microsoft.com/office/powerpoint/2010/main" val="807883999"/>
       </p:ext>
     </p:extLst>
   </p:cSld>
@@ -699,8 +1053,8 @@
         </p:nvSpPr>
         <p:spPr>
           <a:xfrm>
-            <a:off x="9274751" y="115032"/>
-            <a:ext cx="2794575" cy="1830998"/>
+            <a:off x="14168874" y="191691"/>
+            <a:ext cx="4269224" cy="3051215"/>
           </a:xfrm>
         </p:spPr>
         <p:txBody>
@@ -708,7 +1062,7 @@
           <a:lstStyle/>
           <a:p>
             <a:r>
-              <a:rPr lang="en-US"/>
+              <a:rPr lang="en-GB"/>
               <a:t>Click to edit Master title style</a:t>
             </a:r>
             <a:endParaRPr lang="en-US" dirty="0"/>
@@ -727,8 +1081,8 @@
         </p:nvSpPr>
         <p:spPr>
           <a:xfrm>
-            <a:off x="891024" y="115032"/>
-            <a:ext cx="8221722" cy="1830998"/>
+            <a:off x="1361202" y="191691"/>
+            <a:ext cx="12560181" cy="3051215"/>
           </a:xfrm>
         </p:spPr>
         <p:txBody>
@@ -737,35 +1091,35 @@
           <a:p>
             <a:pPr lvl="0"/>
             <a:r>
-              <a:rPr lang="en-US"/>
+              <a:rPr lang="en-GB"/>
               <a:t>Click to edit Master text styles</a:t>
             </a:r>
           </a:p>
           <a:p>
             <a:pPr lvl="1"/>
             <a:r>
-              <a:rPr lang="en-US"/>
+              <a:rPr lang="en-GB"/>
               <a:t>Second level</a:t>
             </a:r>
           </a:p>
           <a:p>
             <a:pPr lvl="2"/>
             <a:r>
-              <a:rPr lang="en-US"/>
+              <a:rPr lang="en-GB"/>
               <a:t>Third level</a:t>
             </a:r>
           </a:p>
           <a:p>
             <a:pPr lvl="3"/>
             <a:r>
-              <a:rPr lang="en-US"/>
+              <a:rPr lang="en-GB"/>
               <a:t>Fourth level</a:t>
             </a:r>
           </a:p>
           <a:p>
             <a:pPr lvl="4"/>
             <a:r>
-              <a:rPr lang="en-US"/>
+              <a:rPr lang="en-GB"/>
               <a:t>Fifth level</a:t>
             </a:r>
             <a:endParaRPr lang="en-US" dirty="0"/>
@@ -789,7 +1143,7 @@
           <a:p>
             <a:fld id="{BAE14841-EB75-4F4F-9DE8-73B3A903F4E0}" type="datetimeFigureOut">
               <a:rPr lang="en-GB" smtClean="0"/>
-              <a:t>28/09/2023</a:t>
+              <a:t>19/03/2024</a:t>
             </a:fld>
             <a:endParaRPr lang="en-GB"/>
           </a:p>
@@ -840,7 +1194,7 @@
     </p:spTree>
     <p:extLst>
       <p:ext uri="{BB962C8B-B14F-4D97-AF65-F5344CB8AC3E}">
-        <p14:creationId xmlns:p14="http://schemas.microsoft.com/office/powerpoint/2010/main" val="1785897837"/>
+        <p14:creationId xmlns:p14="http://schemas.microsoft.com/office/powerpoint/2010/main" val="1829774693"/>
       </p:ext>
     </p:extLst>
   </p:cSld>
@@ -883,7 +1237,7 @@
           <a:lstStyle/>
           <a:p>
             <a:r>
-              <a:rPr lang="en-US"/>
+              <a:rPr lang="en-GB"/>
               <a:t>Click to edit Master title style</a:t>
             </a:r>
             <a:endParaRPr lang="en-US" dirty="0"/>
@@ -907,35 +1261,35 @@
           <a:p>
             <a:pPr lvl="0"/>
             <a:r>
-              <a:rPr lang="en-US"/>
+              <a:rPr lang="en-GB"/>
               <a:t>Click to edit Master text styles</a:t>
             </a:r>
           </a:p>
           <a:p>
             <a:pPr lvl="1"/>
             <a:r>
-              <a:rPr lang="en-US"/>
+              <a:rPr lang="en-GB"/>
               <a:t>Second level</a:t>
             </a:r>
           </a:p>
           <a:p>
             <a:pPr lvl="2"/>
             <a:r>
-              <a:rPr lang="en-US"/>
+              <a:rPr lang="en-GB"/>
               <a:t>Third level</a:t>
             </a:r>
           </a:p>
           <a:p>
             <a:pPr lvl="3"/>
             <a:r>
-              <a:rPr lang="en-US"/>
+              <a:rPr lang="en-GB"/>
               <a:t>Fourth level</a:t>
             </a:r>
           </a:p>
           <a:p>
             <a:pPr lvl="4"/>
             <a:r>
-              <a:rPr lang="en-US"/>
+              <a:rPr lang="en-GB"/>
               <a:t>Fifth level</a:t>
             </a:r>
             <a:endParaRPr lang="en-US" dirty="0"/>
@@ -959,7 +1313,7 @@
           <a:p>
             <a:fld id="{BAE14841-EB75-4F4F-9DE8-73B3A903F4E0}" type="datetimeFigureOut">
               <a:rPr lang="en-GB" smtClean="0"/>
-              <a:t>28/09/2023</a:t>
+              <a:t>19/03/2024</a:t>
             </a:fld>
             <a:endParaRPr lang="en-GB"/>
           </a:p>
@@ -1010,7 +1364,7 @@
     </p:spTree>
     <p:extLst>
       <p:ext uri="{BB962C8B-B14F-4D97-AF65-F5344CB8AC3E}">
-        <p14:creationId xmlns:p14="http://schemas.microsoft.com/office/powerpoint/2010/main" val="2110672688"/>
+        <p14:creationId xmlns:p14="http://schemas.microsoft.com/office/powerpoint/2010/main" val="2325418665"/>
       </p:ext>
     </p:extLst>
   </p:cSld>
@@ -1049,20 +1403,20 @@
         </p:nvSpPr>
         <p:spPr>
           <a:xfrm>
-            <a:off x="884274" y="538647"/>
-            <a:ext cx="11178302" cy="898744"/>
+            <a:off x="1350890" y="897613"/>
+            <a:ext cx="17076896" cy="1497687"/>
           </a:xfrm>
         </p:spPr>
         <p:txBody>
           <a:bodyPr anchor="b"/>
           <a:lstStyle>
             <a:lvl1pPr>
-              <a:defRPr sz="1890"/>
+              <a:defRPr sz="3150"/>
             </a:lvl1pPr>
           </a:lstStyle>
           <a:p>
             <a:r>
-              <a:rPr lang="en-US"/>
+              <a:rPr lang="en-GB"/>
               <a:t>Click to edit Master title style</a:t>
             </a:r>
             <a:endParaRPr lang="en-US" dirty="0"/>
@@ -1081,8 +1435,8 @@
         </p:nvSpPr>
         <p:spPr>
           <a:xfrm>
-            <a:off x="884274" y="1445894"/>
-            <a:ext cx="11178302" cy="472628"/>
+            <a:off x="1350890" y="2409468"/>
+            <a:ext cx="17076896" cy="787598"/>
           </a:xfrm>
         </p:spPr>
         <p:txBody>
@@ -1090,7 +1444,7 @@
           <a:lstStyle>
             <a:lvl1pPr marL="0" indent="0">
               <a:buNone/>
-              <a:defRPr sz="756">
+              <a:defRPr sz="1260">
                 <a:solidFill>
                   <a:schemeClr val="tx1">
                     <a:tint val="75000"/>
@@ -1098,9 +1452,9 @@
                 </a:solidFill>
               </a:defRPr>
             </a:lvl1pPr>
-            <a:lvl2pPr marL="144018" indent="0">
-              <a:buNone/>
-              <a:defRPr sz="630">
+            <a:lvl2pPr marL="240030" indent="0">
+              <a:buNone/>
+              <a:defRPr sz="1050">
                 <a:solidFill>
                   <a:schemeClr val="tx1">
                     <a:tint val="75000"/>
@@ -1108,9 +1462,9 @@
                 </a:solidFill>
               </a:defRPr>
             </a:lvl2pPr>
-            <a:lvl3pPr marL="288036" indent="0">
-              <a:buNone/>
-              <a:defRPr sz="567">
+            <a:lvl3pPr marL="480060" indent="0">
+              <a:buNone/>
+              <a:defRPr sz="945">
                 <a:solidFill>
                   <a:schemeClr val="tx1">
                     <a:tint val="75000"/>
@@ -1118,9 +1472,9 @@
                 </a:solidFill>
               </a:defRPr>
             </a:lvl3pPr>
-            <a:lvl4pPr marL="432054" indent="0">
-              <a:buNone/>
-              <a:defRPr sz="504">
+            <a:lvl4pPr marL="720090" indent="0">
+              <a:buNone/>
+              <a:defRPr sz="840">
                 <a:solidFill>
                   <a:schemeClr val="tx1">
                     <a:tint val="75000"/>
@@ -1128,9 +1482,9 @@
                 </a:solidFill>
               </a:defRPr>
             </a:lvl4pPr>
-            <a:lvl5pPr marL="576072" indent="0">
-              <a:buNone/>
-              <a:defRPr sz="504">
+            <a:lvl5pPr marL="960120" indent="0">
+              <a:buNone/>
+              <a:defRPr sz="840">
                 <a:solidFill>
                   <a:schemeClr val="tx1">
                     <a:tint val="75000"/>
@@ -1138,9 +1492,9 @@
                 </a:solidFill>
               </a:defRPr>
             </a:lvl5pPr>
-            <a:lvl6pPr marL="720090" indent="0">
-              <a:buNone/>
-              <a:defRPr sz="504">
+            <a:lvl6pPr marL="1200150" indent="0">
+              <a:buNone/>
+              <a:defRPr sz="840">
                 <a:solidFill>
                   <a:schemeClr val="tx1">
                     <a:tint val="75000"/>
@@ -1148,9 +1502,9 @@
                 </a:solidFill>
               </a:defRPr>
             </a:lvl6pPr>
-            <a:lvl7pPr marL="864108" indent="0">
-              <a:buNone/>
-              <a:defRPr sz="504">
+            <a:lvl7pPr marL="1440180" indent="0">
+              <a:buNone/>
+              <a:defRPr sz="840">
                 <a:solidFill>
                   <a:schemeClr val="tx1">
                     <a:tint val="75000"/>
@@ -1158,9 +1512,9 @@
                 </a:solidFill>
               </a:defRPr>
             </a:lvl7pPr>
-            <a:lvl8pPr marL="1008126" indent="0">
-              <a:buNone/>
-              <a:defRPr sz="504">
+            <a:lvl8pPr marL="1680210" indent="0">
+              <a:buNone/>
+              <a:defRPr sz="840">
                 <a:solidFill>
                   <a:schemeClr val="tx1">
                     <a:tint val="75000"/>
@@ -1168,9 +1522,9 @@
                 </a:solidFill>
               </a:defRPr>
             </a:lvl8pPr>
-            <a:lvl9pPr marL="1152144" indent="0">
-              <a:buNone/>
-              <a:defRPr sz="504">
+            <a:lvl9pPr marL="1920240" indent="0">
+              <a:buNone/>
+              <a:defRPr sz="840">
                 <a:solidFill>
                   <a:schemeClr val="tx1">
                     <a:tint val="75000"/>
@@ -1182,7 +1536,7 @@
           <a:p>
             <a:pPr lvl="0"/>
             <a:r>
-              <a:rPr lang="en-US"/>
+              <a:rPr lang="en-GB"/>
               <a:t>Click to edit Master text styles</a:t>
             </a:r>
           </a:p>
@@ -1205,7 +1559,7 @@
           <a:p>
             <a:fld id="{BAE14841-EB75-4F4F-9DE8-73B3A903F4E0}" type="datetimeFigureOut">
               <a:rPr lang="en-GB" smtClean="0"/>
-              <a:t>28/09/2023</a:t>
+              <a:t>19/03/2024</a:t>
             </a:fld>
             <a:endParaRPr lang="en-GB"/>
           </a:p>
@@ -1256,7 +1610,7 @@
     </p:spTree>
     <p:extLst>
       <p:ext uri="{BB962C8B-B14F-4D97-AF65-F5344CB8AC3E}">
-        <p14:creationId xmlns:p14="http://schemas.microsoft.com/office/powerpoint/2010/main" val="3447206291"/>
+        <p14:creationId xmlns:p14="http://schemas.microsoft.com/office/powerpoint/2010/main" val="2062831940"/>
       </p:ext>
     </p:extLst>
   </p:cSld>
@@ -1299,7 +1653,7 @@
           <a:lstStyle/>
           <a:p>
             <a:r>
-              <a:rPr lang="en-US"/>
+              <a:rPr lang="en-GB"/>
               <a:t>Click to edit Master title style</a:t>
             </a:r>
             <a:endParaRPr lang="en-US" dirty="0"/>
@@ -1318,8 +1672,8 @@
         </p:nvSpPr>
         <p:spPr>
           <a:xfrm>
-            <a:off x="891024" y="575157"/>
-            <a:ext cx="5508149" cy="1370873"/>
+            <a:off x="1361202" y="958453"/>
+            <a:ext cx="8414703" cy="2284452"/>
           </a:xfrm>
         </p:spPr>
         <p:txBody>
@@ -1328,35 +1682,35 @@
           <a:p>
             <a:pPr lvl="0"/>
             <a:r>
-              <a:rPr lang="en-US"/>
+              <a:rPr lang="en-GB"/>
               <a:t>Click to edit Master text styles</a:t>
             </a:r>
           </a:p>
           <a:p>
             <a:pPr lvl="1"/>
             <a:r>
-              <a:rPr lang="en-US"/>
+              <a:rPr lang="en-GB"/>
               <a:t>Second level</a:t>
             </a:r>
           </a:p>
           <a:p>
             <a:pPr lvl="2"/>
             <a:r>
-              <a:rPr lang="en-US"/>
+              <a:rPr lang="en-GB"/>
               <a:t>Third level</a:t>
             </a:r>
           </a:p>
           <a:p>
             <a:pPr lvl="3"/>
             <a:r>
-              <a:rPr lang="en-US"/>
+              <a:rPr lang="en-GB"/>
               <a:t>Fourth level</a:t>
             </a:r>
           </a:p>
           <a:p>
             <a:pPr lvl="4"/>
             <a:r>
-              <a:rPr lang="en-US"/>
+              <a:rPr lang="en-GB"/>
               <a:t>Fifth level</a:t>
             </a:r>
             <a:endParaRPr lang="en-US" dirty="0"/>
@@ -1375,8 +1729,8 @@
         </p:nvSpPr>
         <p:spPr>
           <a:xfrm>
-            <a:off x="6561177" y="575157"/>
-            <a:ext cx="5508149" cy="1370873"/>
+            <a:off x="10023395" y="958453"/>
+            <a:ext cx="8414703" cy="2284452"/>
           </a:xfrm>
         </p:spPr>
         <p:txBody>
@@ -1385,35 +1739,35 @@
           <a:p>
             <a:pPr lvl="0"/>
             <a:r>
-              <a:rPr lang="en-US"/>
+              <a:rPr lang="en-GB"/>
               <a:t>Click to edit Master text styles</a:t>
             </a:r>
           </a:p>
           <a:p>
             <a:pPr lvl="1"/>
             <a:r>
-              <a:rPr lang="en-US"/>
+              <a:rPr lang="en-GB"/>
               <a:t>Second level</a:t>
             </a:r>
           </a:p>
           <a:p>
             <a:pPr lvl="2"/>
             <a:r>
-              <a:rPr lang="en-US"/>
+              <a:rPr lang="en-GB"/>
               <a:t>Third level</a:t>
             </a:r>
           </a:p>
           <a:p>
             <a:pPr lvl="3"/>
             <a:r>
-              <a:rPr lang="en-US"/>
+              <a:rPr lang="en-GB"/>
               <a:t>Fourth level</a:t>
             </a:r>
           </a:p>
           <a:p>
             <a:pPr lvl="4"/>
             <a:r>
-              <a:rPr lang="en-US"/>
+              <a:rPr lang="en-GB"/>
               <a:t>Fifth level</a:t>
             </a:r>
             <a:endParaRPr lang="en-US" dirty="0"/>
@@ -1437,7 +1791,7 @@
           <a:p>
             <a:fld id="{BAE14841-EB75-4F4F-9DE8-73B3A903F4E0}" type="datetimeFigureOut">
               <a:rPr lang="en-GB" smtClean="0"/>
-              <a:t>28/09/2023</a:t>
+              <a:t>19/03/2024</a:t>
             </a:fld>
             <a:endParaRPr lang="en-GB"/>
           </a:p>
@@ -1488,7 +1842,7 @@
     </p:spTree>
     <p:extLst>
       <p:ext uri="{BB962C8B-B14F-4D97-AF65-F5344CB8AC3E}">
-        <p14:creationId xmlns:p14="http://schemas.microsoft.com/office/powerpoint/2010/main" val="1346981926"/>
+        <p14:creationId xmlns:p14="http://schemas.microsoft.com/office/powerpoint/2010/main" val="147925547"/>
       </p:ext>
     </p:extLst>
   </p:cSld>
@@ -1527,8 +1881,8 @@
         </p:nvSpPr>
         <p:spPr>
           <a:xfrm>
-            <a:off x="892712" y="115031"/>
-            <a:ext cx="11178302" cy="417614"/>
+            <a:off x="1363781" y="191691"/>
+            <a:ext cx="17076896" cy="695921"/>
           </a:xfrm>
         </p:spPr>
         <p:txBody>
@@ -1536,7 +1890,7 @@
           <a:lstStyle/>
           <a:p>
             <a:r>
-              <a:rPr lang="en-US"/>
+              <a:rPr lang="en-GB"/>
               <a:t>Click to edit Master title style</a:t>
             </a:r>
             <a:endParaRPr lang="en-US" dirty="0"/>
@@ -1555,8 +1909,8 @@
         </p:nvSpPr>
         <p:spPr>
           <a:xfrm>
-            <a:off x="892713" y="529645"/>
-            <a:ext cx="5482835" cy="259570"/>
+            <a:off x="1363782" y="882610"/>
+            <a:ext cx="8376031" cy="432554"/>
           </a:xfrm>
         </p:spPr>
         <p:txBody>
@@ -1564,45 +1918,45 @@
           <a:lstStyle>
             <a:lvl1pPr marL="0" indent="0">
               <a:buNone/>
-              <a:defRPr sz="756" b="1"/>
+              <a:defRPr sz="1260" b="1"/>
             </a:lvl1pPr>
-            <a:lvl2pPr marL="144018" indent="0">
-              <a:buNone/>
-              <a:defRPr sz="630" b="1"/>
+            <a:lvl2pPr marL="240030" indent="0">
+              <a:buNone/>
+              <a:defRPr sz="1050" b="1"/>
             </a:lvl2pPr>
-            <a:lvl3pPr marL="288036" indent="0">
-              <a:buNone/>
-              <a:defRPr sz="567" b="1"/>
+            <a:lvl3pPr marL="480060" indent="0">
+              <a:buNone/>
+              <a:defRPr sz="945" b="1"/>
             </a:lvl3pPr>
-            <a:lvl4pPr marL="432054" indent="0">
-              <a:buNone/>
-              <a:defRPr sz="504" b="1"/>
+            <a:lvl4pPr marL="720090" indent="0">
+              <a:buNone/>
+              <a:defRPr sz="840" b="1"/>
             </a:lvl4pPr>
-            <a:lvl5pPr marL="576072" indent="0">
-              <a:buNone/>
-              <a:defRPr sz="504" b="1"/>
+            <a:lvl5pPr marL="960120" indent="0">
+              <a:buNone/>
+              <a:defRPr sz="840" b="1"/>
             </a:lvl5pPr>
-            <a:lvl6pPr marL="720090" indent="0">
-              <a:buNone/>
-              <a:defRPr sz="504" b="1"/>
+            <a:lvl6pPr marL="1200150" indent="0">
+              <a:buNone/>
+              <a:defRPr sz="840" b="1"/>
             </a:lvl6pPr>
-            <a:lvl7pPr marL="864108" indent="0">
-              <a:buNone/>
-              <a:defRPr sz="504" b="1"/>
+            <a:lvl7pPr marL="1440180" indent="0">
+              <a:buNone/>
+              <a:defRPr sz="840" b="1"/>
             </a:lvl7pPr>
-            <a:lvl8pPr marL="1008126" indent="0">
-              <a:buNone/>
-              <a:defRPr sz="504" b="1"/>
+            <a:lvl8pPr marL="1680210" indent="0">
+              <a:buNone/>
+              <a:defRPr sz="840" b="1"/>
             </a:lvl8pPr>
-            <a:lvl9pPr marL="1152144" indent="0">
-              <a:buNone/>
-              <a:defRPr sz="504" b="1"/>
+            <a:lvl9pPr marL="1920240" indent="0">
+              <a:buNone/>
+              <a:defRPr sz="840" b="1"/>
             </a:lvl9pPr>
           </a:lstStyle>
           <a:p>
             <a:pPr lvl="0"/>
             <a:r>
-              <a:rPr lang="en-US"/>
+              <a:rPr lang="en-GB"/>
               <a:t>Click to edit Master text styles</a:t>
             </a:r>
           </a:p>
@@ -1620,8 +1974,8 @@
         </p:nvSpPr>
         <p:spPr>
           <a:xfrm>
-            <a:off x="892713" y="789215"/>
-            <a:ext cx="5482835" cy="1160816"/>
+            <a:off x="1363782" y="1315164"/>
+            <a:ext cx="8376031" cy="1934409"/>
           </a:xfrm>
         </p:spPr>
         <p:txBody>
@@ -1630,35 +1984,35 @@
           <a:p>
             <a:pPr lvl="0"/>
             <a:r>
-              <a:rPr lang="en-US"/>
+              <a:rPr lang="en-GB"/>
               <a:t>Click to edit Master text styles</a:t>
             </a:r>
           </a:p>
           <a:p>
             <a:pPr lvl="1"/>
             <a:r>
-              <a:rPr lang="en-US"/>
+              <a:rPr lang="en-GB"/>
               <a:t>Second level</a:t>
             </a:r>
           </a:p>
           <a:p>
             <a:pPr lvl="2"/>
             <a:r>
-              <a:rPr lang="en-US"/>
+              <a:rPr lang="en-GB"/>
               <a:t>Third level</a:t>
             </a:r>
           </a:p>
           <a:p>
             <a:pPr lvl="3"/>
             <a:r>
-              <a:rPr lang="en-US"/>
+              <a:rPr lang="en-GB"/>
               <a:t>Fourth level</a:t>
             </a:r>
           </a:p>
           <a:p>
             <a:pPr lvl="4"/>
             <a:r>
-              <a:rPr lang="en-US"/>
+              <a:rPr lang="en-GB"/>
               <a:t>Fifth level</a:t>
             </a:r>
             <a:endParaRPr lang="en-US" dirty="0"/>
@@ -1677,8 +2031,8 @@
         </p:nvSpPr>
         <p:spPr>
           <a:xfrm>
-            <a:off x="6561177" y="529645"/>
-            <a:ext cx="5509837" cy="259570"/>
+            <a:off x="10023396" y="882610"/>
+            <a:ext cx="8417281" cy="432554"/>
           </a:xfrm>
         </p:spPr>
         <p:txBody>
@@ -1686,45 +2040,45 @@
           <a:lstStyle>
             <a:lvl1pPr marL="0" indent="0">
               <a:buNone/>
-              <a:defRPr sz="756" b="1"/>
+              <a:defRPr sz="1260" b="1"/>
             </a:lvl1pPr>
-            <a:lvl2pPr marL="144018" indent="0">
-              <a:buNone/>
-              <a:defRPr sz="630" b="1"/>
+            <a:lvl2pPr marL="240030" indent="0">
+              <a:buNone/>
+              <a:defRPr sz="1050" b="1"/>
             </a:lvl2pPr>
-            <a:lvl3pPr marL="288036" indent="0">
-              <a:buNone/>
-              <a:defRPr sz="567" b="1"/>
+            <a:lvl3pPr marL="480060" indent="0">
+              <a:buNone/>
+              <a:defRPr sz="945" b="1"/>
             </a:lvl3pPr>
-            <a:lvl4pPr marL="432054" indent="0">
-              <a:buNone/>
-              <a:defRPr sz="504" b="1"/>
+            <a:lvl4pPr marL="720090" indent="0">
+              <a:buNone/>
+              <a:defRPr sz="840" b="1"/>
             </a:lvl4pPr>
-            <a:lvl5pPr marL="576072" indent="0">
-              <a:buNone/>
-              <a:defRPr sz="504" b="1"/>
+            <a:lvl5pPr marL="960120" indent="0">
+              <a:buNone/>
+              <a:defRPr sz="840" b="1"/>
             </a:lvl5pPr>
-            <a:lvl6pPr marL="720090" indent="0">
-              <a:buNone/>
-              <a:defRPr sz="504" b="1"/>
+            <a:lvl6pPr marL="1200150" indent="0">
+              <a:buNone/>
+              <a:defRPr sz="840" b="1"/>
             </a:lvl6pPr>
-            <a:lvl7pPr marL="864108" indent="0">
-              <a:buNone/>
-              <a:defRPr sz="504" b="1"/>
+            <a:lvl7pPr marL="1440180" indent="0">
+              <a:buNone/>
+              <a:defRPr sz="840" b="1"/>
             </a:lvl7pPr>
-            <a:lvl8pPr marL="1008126" indent="0">
-              <a:buNone/>
-              <a:defRPr sz="504" b="1"/>
+            <a:lvl8pPr marL="1680210" indent="0">
+              <a:buNone/>
+              <a:defRPr sz="840" b="1"/>
             </a:lvl8pPr>
-            <a:lvl9pPr marL="1152144" indent="0">
-              <a:buNone/>
-              <a:defRPr sz="504" b="1"/>
+            <a:lvl9pPr marL="1920240" indent="0">
+              <a:buNone/>
+              <a:defRPr sz="840" b="1"/>
             </a:lvl9pPr>
           </a:lstStyle>
           <a:p>
             <a:pPr lvl="0"/>
             <a:r>
-              <a:rPr lang="en-US"/>
+              <a:rPr lang="en-GB"/>
               <a:t>Click to edit Master text styles</a:t>
             </a:r>
           </a:p>
@@ -1742,8 +2096,8 @@
         </p:nvSpPr>
         <p:spPr>
           <a:xfrm>
-            <a:off x="6561177" y="789215"/>
-            <a:ext cx="5509837" cy="1160816"/>
+            <a:off x="10023396" y="1315164"/>
+            <a:ext cx="8417281" cy="1934409"/>
           </a:xfrm>
         </p:spPr>
         <p:txBody>
@@ -1752,35 +2106,35 @@
           <a:p>
             <a:pPr lvl="0"/>
             <a:r>
-              <a:rPr lang="en-US"/>
+              <a:rPr lang="en-GB"/>
               <a:t>Click to edit Master text styles</a:t>
             </a:r>
           </a:p>
           <a:p>
             <a:pPr lvl="1"/>
             <a:r>
-              <a:rPr lang="en-US"/>
+              <a:rPr lang="en-GB"/>
               <a:t>Second level</a:t>
             </a:r>
           </a:p>
           <a:p>
             <a:pPr lvl="2"/>
             <a:r>
-              <a:rPr lang="en-US"/>
+              <a:rPr lang="en-GB"/>
               <a:t>Third level</a:t>
             </a:r>
           </a:p>
           <a:p>
             <a:pPr lvl="3"/>
             <a:r>
-              <a:rPr lang="en-US"/>
+              <a:rPr lang="en-GB"/>
               <a:t>Fourth level</a:t>
             </a:r>
           </a:p>
           <a:p>
             <a:pPr lvl="4"/>
             <a:r>
-              <a:rPr lang="en-US"/>
+              <a:rPr lang="en-GB"/>
               <a:t>Fifth level</a:t>
             </a:r>
             <a:endParaRPr lang="en-US" dirty="0"/>
@@ -1804,7 +2158,7 @@
           <a:p>
             <a:fld id="{BAE14841-EB75-4F4F-9DE8-73B3A903F4E0}" type="datetimeFigureOut">
               <a:rPr lang="en-GB" smtClean="0"/>
-              <a:t>28/09/2023</a:t>
+              <a:t>19/03/2024</a:t>
             </a:fld>
             <a:endParaRPr lang="en-GB"/>
           </a:p>
@@ -1855,7 +2209,7 @@
     </p:spTree>
     <p:extLst>
       <p:ext uri="{BB962C8B-B14F-4D97-AF65-F5344CB8AC3E}">
-        <p14:creationId xmlns:p14="http://schemas.microsoft.com/office/powerpoint/2010/main" val="1090516388"/>
+        <p14:creationId xmlns:p14="http://schemas.microsoft.com/office/powerpoint/2010/main" val="932042859"/>
       </p:ext>
     </p:extLst>
   </p:cSld>
@@ -1898,7 +2252,7 @@
           <a:lstStyle/>
           <a:p>
             <a:r>
-              <a:rPr lang="en-US"/>
+              <a:rPr lang="en-GB"/>
               <a:t>Click to edit Master title style</a:t>
             </a:r>
             <a:endParaRPr lang="en-US" dirty="0"/>
@@ -1922,7 +2276,7 @@
           <a:p>
             <a:fld id="{BAE14841-EB75-4F4F-9DE8-73B3A903F4E0}" type="datetimeFigureOut">
               <a:rPr lang="en-GB" smtClean="0"/>
-              <a:t>28/09/2023</a:t>
+              <a:t>19/03/2024</a:t>
             </a:fld>
             <a:endParaRPr lang="en-GB"/>
           </a:p>
@@ -1973,7 +2327,7 @@
     </p:spTree>
     <p:extLst>
       <p:ext uri="{BB962C8B-B14F-4D97-AF65-F5344CB8AC3E}">
-        <p14:creationId xmlns:p14="http://schemas.microsoft.com/office/powerpoint/2010/main" val="2372573827"/>
+        <p14:creationId xmlns:p14="http://schemas.microsoft.com/office/powerpoint/2010/main" val="2414408236"/>
       </p:ext>
     </p:extLst>
   </p:cSld>
@@ -2017,7 +2371,7 @@
           <a:p>
             <a:fld id="{BAE14841-EB75-4F4F-9DE8-73B3A903F4E0}" type="datetimeFigureOut">
               <a:rPr lang="en-GB" smtClean="0"/>
-              <a:t>28/09/2023</a:t>
+              <a:t>19/03/2024</a:t>
             </a:fld>
             <a:endParaRPr lang="en-GB"/>
           </a:p>
@@ -2068,7 +2422,7 @@
     </p:spTree>
     <p:extLst>
       <p:ext uri="{BB962C8B-B14F-4D97-AF65-F5344CB8AC3E}">
-        <p14:creationId xmlns:p14="http://schemas.microsoft.com/office/powerpoint/2010/main" val="296625915"/>
+        <p14:creationId xmlns:p14="http://schemas.microsoft.com/office/powerpoint/2010/main" val="2853620500"/>
       </p:ext>
     </p:extLst>
   </p:cSld>
@@ -2107,20 +2461,20 @@
         </p:nvSpPr>
         <p:spPr>
           <a:xfrm>
-            <a:off x="892713" y="144039"/>
-            <a:ext cx="4180050" cy="504137"/>
+            <a:off x="1363782" y="240030"/>
+            <a:ext cx="6385789" cy="840105"/>
           </a:xfrm>
         </p:spPr>
         <p:txBody>
           <a:bodyPr anchor="b"/>
           <a:lstStyle>
             <a:lvl1pPr>
-              <a:defRPr sz="1008"/>
+              <a:defRPr sz="1680"/>
             </a:lvl1pPr>
           </a:lstStyle>
           <a:p>
             <a:r>
-              <a:rPr lang="en-US"/>
+              <a:rPr lang="en-GB"/>
               <a:t>Click to edit Master title style</a:t>
             </a:r>
             <a:endParaRPr lang="en-US" dirty="0"/>
@@ -2139,73 +2493,73 @@
         </p:nvSpPr>
         <p:spPr>
           <a:xfrm>
-            <a:off x="5509837" y="311085"/>
-            <a:ext cx="6561177" cy="1535418"/>
+            <a:off x="8417281" y="518398"/>
+            <a:ext cx="10023396" cy="2558653"/>
           </a:xfrm>
         </p:spPr>
         <p:txBody>
           <a:bodyPr/>
           <a:lstStyle>
             <a:lvl1pPr>
-              <a:defRPr sz="1008"/>
+              <a:defRPr sz="1680"/>
             </a:lvl1pPr>
             <a:lvl2pPr>
-              <a:defRPr sz="882"/>
+              <a:defRPr sz="1470"/>
             </a:lvl2pPr>
             <a:lvl3pPr>
-              <a:defRPr sz="756"/>
+              <a:defRPr sz="1260"/>
             </a:lvl3pPr>
             <a:lvl4pPr>
-              <a:defRPr sz="630"/>
+              <a:defRPr sz="1050"/>
             </a:lvl4pPr>
             <a:lvl5pPr>
-              <a:defRPr sz="630"/>
+              <a:defRPr sz="1050"/>
             </a:lvl5pPr>
             <a:lvl6pPr>
-              <a:defRPr sz="630"/>
+              <a:defRPr sz="1050"/>
             </a:lvl6pPr>
             <a:lvl7pPr>
-              <a:defRPr sz="630"/>
+              <a:defRPr sz="1050"/>
             </a:lvl7pPr>
             <a:lvl8pPr>
-              <a:defRPr sz="630"/>
+              <a:defRPr sz="1050"/>
             </a:lvl8pPr>
             <a:lvl9pPr>
-              <a:defRPr sz="630"/>
+              <a:defRPr sz="1050"/>
             </a:lvl9pPr>
           </a:lstStyle>
           <a:p>
             <a:pPr lvl="0"/>
             <a:r>
-              <a:rPr lang="en-US"/>
+              <a:rPr lang="en-GB"/>
               <a:t>Click to edit Master text styles</a:t>
             </a:r>
           </a:p>
           <a:p>
             <a:pPr lvl="1"/>
             <a:r>
-              <a:rPr lang="en-US"/>
+              <a:rPr lang="en-GB"/>
               <a:t>Second level</a:t>
             </a:r>
           </a:p>
           <a:p>
             <a:pPr lvl="2"/>
             <a:r>
-              <a:rPr lang="en-US"/>
+              <a:rPr lang="en-GB"/>
               <a:t>Third level</a:t>
             </a:r>
           </a:p>
           <a:p>
             <a:pPr lvl="3"/>
             <a:r>
-              <a:rPr lang="en-US"/>
+              <a:rPr lang="en-GB"/>
               <a:t>Fourth level</a:t>
             </a:r>
           </a:p>
           <a:p>
             <a:pPr lvl="4"/>
             <a:r>
-              <a:rPr lang="en-US"/>
+              <a:rPr lang="en-GB"/>
               <a:t>Fifth level</a:t>
             </a:r>
             <a:endParaRPr lang="en-US" dirty="0"/>
@@ -2224,8 +2578,8 @@
         </p:nvSpPr>
         <p:spPr>
           <a:xfrm>
-            <a:off x="892713" y="648176"/>
-            <a:ext cx="4180050" cy="1200827"/>
+            <a:off x="1363782" y="1080135"/>
+            <a:ext cx="6385789" cy="2001084"/>
           </a:xfrm>
         </p:spPr>
         <p:txBody>
@@ -2233,45 +2587,45 @@
           <a:lstStyle>
             <a:lvl1pPr marL="0" indent="0">
               <a:buNone/>
-              <a:defRPr sz="504"/>
+              <a:defRPr sz="840"/>
             </a:lvl1pPr>
-            <a:lvl2pPr marL="144018" indent="0">
-              <a:buNone/>
-              <a:defRPr sz="441"/>
+            <a:lvl2pPr marL="240030" indent="0">
+              <a:buNone/>
+              <a:defRPr sz="735"/>
             </a:lvl2pPr>
-            <a:lvl3pPr marL="288036" indent="0">
-              <a:buNone/>
-              <a:defRPr sz="378"/>
+            <a:lvl3pPr marL="480060" indent="0">
+              <a:buNone/>
+              <a:defRPr sz="630"/>
             </a:lvl3pPr>
-            <a:lvl4pPr marL="432054" indent="0">
-              <a:buNone/>
-              <a:defRPr sz="315"/>
+            <a:lvl4pPr marL="720090" indent="0">
+              <a:buNone/>
+              <a:defRPr sz="525"/>
             </a:lvl4pPr>
-            <a:lvl5pPr marL="576072" indent="0">
-              <a:buNone/>
-              <a:defRPr sz="315"/>
+            <a:lvl5pPr marL="960120" indent="0">
+              <a:buNone/>
+              <a:defRPr sz="525"/>
             </a:lvl5pPr>
-            <a:lvl6pPr marL="720090" indent="0">
-              <a:buNone/>
-              <a:defRPr sz="315"/>
+            <a:lvl6pPr marL="1200150" indent="0">
+              <a:buNone/>
+              <a:defRPr sz="525"/>
             </a:lvl6pPr>
-            <a:lvl7pPr marL="864108" indent="0">
-              <a:buNone/>
-              <a:defRPr sz="315"/>
+            <a:lvl7pPr marL="1440180" indent="0">
+              <a:buNone/>
+              <a:defRPr sz="525"/>
             </a:lvl7pPr>
-            <a:lvl8pPr marL="1008126" indent="0">
-              <a:buNone/>
-              <a:defRPr sz="315"/>
+            <a:lvl8pPr marL="1680210" indent="0">
+              <a:buNone/>
+              <a:defRPr sz="525"/>
             </a:lvl8pPr>
-            <a:lvl9pPr marL="1152144" indent="0">
-              <a:buNone/>
-              <a:defRPr sz="315"/>
+            <a:lvl9pPr marL="1920240" indent="0">
+              <a:buNone/>
+              <a:defRPr sz="525"/>
             </a:lvl9pPr>
           </a:lstStyle>
           <a:p>
             <a:pPr lvl="0"/>
             <a:r>
-              <a:rPr lang="en-US"/>
+              <a:rPr lang="en-GB"/>
               <a:t>Click to edit Master text styles</a:t>
             </a:r>
           </a:p>
@@ -2294,7 +2648,7 @@
           <a:p>
             <a:fld id="{BAE14841-EB75-4F4F-9DE8-73B3A903F4E0}" type="datetimeFigureOut">
               <a:rPr lang="en-GB" smtClean="0"/>
-              <a:t>28/09/2023</a:t>
+              <a:t>19/03/2024</a:t>
             </a:fld>
             <a:endParaRPr lang="en-GB"/>
           </a:p>
@@ -2345,7 +2699,7 @@
     </p:spTree>
     <p:extLst>
       <p:ext uri="{BB962C8B-B14F-4D97-AF65-F5344CB8AC3E}">
-        <p14:creationId xmlns:p14="http://schemas.microsoft.com/office/powerpoint/2010/main" val="3899998386"/>
+        <p14:creationId xmlns:p14="http://schemas.microsoft.com/office/powerpoint/2010/main" val="2653254687"/>
       </p:ext>
     </p:extLst>
   </p:cSld>
@@ -2384,20 +2738,20 @@
         </p:nvSpPr>
         <p:spPr>
           <a:xfrm>
-            <a:off x="892713" y="144039"/>
-            <a:ext cx="4180050" cy="504137"/>
+            <a:off x="1363782" y="240030"/>
+            <a:ext cx="6385789" cy="840105"/>
           </a:xfrm>
         </p:spPr>
         <p:txBody>
           <a:bodyPr anchor="b"/>
           <a:lstStyle>
             <a:lvl1pPr>
-              <a:defRPr sz="1008"/>
+              <a:defRPr sz="1680"/>
             </a:lvl1pPr>
           </a:lstStyle>
           <a:p>
             <a:r>
-              <a:rPr lang="en-US"/>
+              <a:rPr lang="en-GB"/>
               <a:t>Click to edit Master title style</a:t>
             </a:r>
             <a:endParaRPr lang="en-US" dirty="0"/>
@@ -2416,8 +2770,8 @@
         </p:nvSpPr>
         <p:spPr>
           <a:xfrm>
-            <a:off x="5509837" y="311085"/>
-            <a:ext cx="6561177" cy="1535418"/>
+            <a:off x="8417281" y="518398"/>
+            <a:ext cx="10023396" cy="2558653"/>
           </a:xfrm>
         </p:spPr>
         <p:txBody>
@@ -2425,44 +2779,44 @@
           <a:lstStyle>
             <a:lvl1pPr marL="0" indent="0">
               <a:buNone/>
-              <a:defRPr sz="1008"/>
+              <a:defRPr sz="1680"/>
             </a:lvl1pPr>
-            <a:lvl2pPr marL="144018" indent="0">
-              <a:buNone/>
-              <a:defRPr sz="882"/>
+            <a:lvl2pPr marL="240030" indent="0">
+              <a:buNone/>
+              <a:defRPr sz="1470"/>
             </a:lvl2pPr>
-            <a:lvl3pPr marL="288036" indent="0">
-              <a:buNone/>
-              <a:defRPr sz="756"/>
+            <a:lvl3pPr marL="480060" indent="0">
+              <a:buNone/>
+              <a:defRPr sz="1260"/>
             </a:lvl3pPr>
-            <a:lvl4pPr marL="432054" indent="0">
-              <a:buNone/>
-              <a:defRPr sz="630"/>
+            <a:lvl4pPr marL="720090" indent="0">
+              <a:buNone/>
+              <a:defRPr sz="1050"/>
             </a:lvl4pPr>
-            <a:lvl5pPr marL="576072" indent="0">
-              <a:buNone/>
-              <a:defRPr sz="630"/>
+            <a:lvl5pPr marL="960120" indent="0">
+              <a:buNone/>
+              <a:defRPr sz="1050"/>
             </a:lvl5pPr>
-            <a:lvl6pPr marL="720090" indent="0">
-              <a:buNone/>
-              <a:defRPr sz="630"/>
+            <a:lvl6pPr marL="1200150" indent="0">
+              <a:buNone/>
+              <a:defRPr sz="1050"/>
             </a:lvl6pPr>
-            <a:lvl7pPr marL="864108" indent="0">
-              <a:buNone/>
-              <a:defRPr sz="630"/>
+            <a:lvl7pPr marL="1440180" indent="0">
+              <a:buNone/>
+              <a:defRPr sz="1050"/>
             </a:lvl7pPr>
-            <a:lvl8pPr marL="1008126" indent="0">
-              <a:buNone/>
-              <a:defRPr sz="630"/>
+            <a:lvl8pPr marL="1680210" indent="0">
+              <a:buNone/>
+              <a:defRPr sz="1050"/>
             </a:lvl8pPr>
-            <a:lvl9pPr marL="1152144" indent="0">
-              <a:buNone/>
-              <a:defRPr sz="630"/>
+            <a:lvl9pPr marL="1920240" indent="0">
+              <a:buNone/>
+              <a:defRPr sz="1050"/>
             </a:lvl9pPr>
           </a:lstStyle>
           <a:p>
             <a:r>
-              <a:rPr lang="en-US"/>
+              <a:rPr lang="en-GB"/>
               <a:t>Click icon to add picture</a:t>
             </a:r>
             <a:endParaRPr lang="en-US" dirty="0"/>
@@ -2481,8 +2835,8 @@
         </p:nvSpPr>
         <p:spPr>
           <a:xfrm>
-            <a:off x="892713" y="648176"/>
-            <a:ext cx="4180050" cy="1200827"/>
+            <a:off x="1363782" y="1080135"/>
+            <a:ext cx="6385789" cy="2001084"/>
           </a:xfrm>
         </p:spPr>
         <p:txBody>
@@ -2490,45 +2844,45 @@
           <a:lstStyle>
             <a:lvl1pPr marL="0" indent="0">
               <a:buNone/>
-              <a:defRPr sz="504"/>
+              <a:defRPr sz="840"/>
             </a:lvl1pPr>
-            <a:lvl2pPr marL="144018" indent="0">
-              <a:buNone/>
-              <a:defRPr sz="441"/>
+            <a:lvl2pPr marL="240030" indent="0">
+              <a:buNone/>
+              <a:defRPr sz="735"/>
             </a:lvl2pPr>
-            <a:lvl3pPr marL="288036" indent="0">
-              <a:buNone/>
-              <a:defRPr sz="378"/>
+            <a:lvl3pPr marL="480060" indent="0">
+              <a:buNone/>
+              <a:defRPr sz="630"/>
             </a:lvl3pPr>
-            <a:lvl4pPr marL="432054" indent="0">
-              <a:buNone/>
-              <a:defRPr sz="315"/>
+            <a:lvl4pPr marL="720090" indent="0">
+              <a:buNone/>
+              <a:defRPr sz="525"/>
             </a:lvl4pPr>
-            <a:lvl5pPr marL="576072" indent="0">
-              <a:buNone/>
-              <a:defRPr sz="315"/>
+            <a:lvl5pPr marL="960120" indent="0">
+              <a:buNone/>
+              <a:defRPr sz="525"/>
             </a:lvl5pPr>
-            <a:lvl6pPr marL="720090" indent="0">
-              <a:buNone/>
-              <a:defRPr sz="315"/>
+            <a:lvl6pPr marL="1200150" indent="0">
+              <a:buNone/>
+              <a:defRPr sz="525"/>
             </a:lvl6pPr>
-            <a:lvl7pPr marL="864108" indent="0">
-              <a:buNone/>
-              <a:defRPr sz="315"/>
+            <a:lvl7pPr marL="1440180" indent="0">
+              <a:buNone/>
+              <a:defRPr sz="525"/>
             </a:lvl7pPr>
-            <a:lvl8pPr marL="1008126" indent="0">
-              <a:buNone/>
-              <a:defRPr sz="315"/>
+            <a:lvl8pPr marL="1680210" indent="0">
+              <a:buNone/>
+              <a:defRPr sz="525"/>
             </a:lvl8pPr>
-            <a:lvl9pPr marL="1152144" indent="0">
-              <a:buNone/>
-              <a:defRPr sz="315"/>
+            <a:lvl9pPr marL="1920240" indent="0">
+              <a:buNone/>
+              <a:defRPr sz="525"/>
             </a:lvl9pPr>
           </a:lstStyle>
           <a:p>
             <a:pPr lvl="0"/>
             <a:r>
-              <a:rPr lang="en-US"/>
+              <a:rPr lang="en-GB"/>
               <a:t>Click to edit Master text styles</a:t>
             </a:r>
           </a:p>
@@ -2551,7 +2905,7 @@
           <a:p>
             <a:fld id="{BAE14841-EB75-4F4F-9DE8-73B3A903F4E0}" type="datetimeFigureOut">
               <a:rPr lang="en-GB" smtClean="0"/>
-              <a:t>28/09/2023</a:t>
+              <a:t>19/03/2024</a:t>
             </a:fld>
             <a:endParaRPr lang="en-GB"/>
           </a:p>
@@ -2602,7 +2956,7 @@
     </p:spTree>
     <p:extLst>
       <p:ext uri="{BB962C8B-B14F-4D97-AF65-F5344CB8AC3E}">
-        <p14:creationId xmlns:p14="http://schemas.microsoft.com/office/powerpoint/2010/main" val="795026101"/>
+        <p14:creationId xmlns:p14="http://schemas.microsoft.com/office/powerpoint/2010/main" val="205733112"/>
       </p:ext>
     </p:extLst>
   </p:cSld>
@@ -2616,26 +2970,9 @@
 <p:sldMaster xmlns:a="http://schemas.openxmlformats.org/drawingml/2006/main" xmlns:r="http://schemas.openxmlformats.org/officeDocument/2006/relationships" xmlns:p="http://schemas.openxmlformats.org/presentationml/2006/main">
   <p:cSld>
     <p:bg>
-      <p:bgPr>
-        <a:gradFill flip="none" rotWithShape="1">
-          <a:gsLst>
-            <a:gs pos="0">
-              <a:srgbClr val="FFC000"/>
-            </a:gs>
-            <a:gs pos="56000">
-              <a:srgbClr val="FFC000">
-                <a:alpha val="75000"/>
-              </a:srgbClr>
-            </a:gs>
-            <a:gs pos="70000">
-              <a:srgbClr val="0070C0"/>
-            </a:gs>
-          </a:gsLst>
-          <a:lin ang="2700000" scaled="1"/>
-          <a:tileRect/>
-        </a:gradFill>
-        <a:effectLst/>
-      </p:bgPr>
+      <p:bgRef idx="1001">
+        <a:schemeClr val="bg1"/>
+      </p:bgRef>
     </p:bg>
     <p:spTree>
       <p:nvGrpSpPr>
@@ -2663,8 +3000,8 @@
         </p:nvSpPr>
         <p:spPr>
           <a:xfrm>
-            <a:off x="891024" y="115031"/>
-            <a:ext cx="11178302" cy="417614"/>
+            <a:off x="1361202" y="191691"/>
+            <a:ext cx="17076896" cy="695921"/>
           </a:xfrm>
           <a:prstGeom prst="rect">
             <a:avLst/>
@@ -2677,7 +3014,7 @@
           <a:lstStyle/>
           <a:p>
             <a:r>
-              <a:rPr lang="en-US"/>
+              <a:rPr lang="en-GB"/>
               <a:t>Click to edit Master title style</a:t>
             </a:r>
             <a:endParaRPr lang="en-US" dirty="0"/>
@@ -2696,8 +3033,8 @@
         </p:nvSpPr>
         <p:spPr>
           <a:xfrm>
-            <a:off x="891024" y="575157"/>
-            <a:ext cx="11178302" cy="1370873"/>
+            <a:off x="1361202" y="958453"/>
+            <a:ext cx="17076896" cy="2284452"/>
           </a:xfrm>
           <a:prstGeom prst="rect">
             <a:avLst/>
@@ -2711,35 +3048,35 @@
           <a:p>
             <a:pPr lvl="0"/>
             <a:r>
-              <a:rPr lang="en-US"/>
+              <a:rPr lang="en-GB"/>
               <a:t>Click to edit Master text styles</a:t>
             </a:r>
           </a:p>
           <a:p>
             <a:pPr lvl="1"/>
             <a:r>
-              <a:rPr lang="en-US"/>
+              <a:rPr lang="en-GB"/>
               <a:t>Second level</a:t>
             </a:r>
           </a:p>
           <a:p>
             <a:pPr lvl="2"/>
             <a:r>
-              <a:rPr lang="en-US"/>
+              <a:rPr lang="en-GB"/>
               <a:t>Third level</a:t>
             </a:r>
           </a:p>
           <a:p>
             <a:pPr lvl="3"/>
             <a:r>
-              <a:rPr lang="en-US"/>
+              <a:rPr lang="en-GB"/>
               <a:t>Fourth level</a:t>
             </a:r>
           </a:p>
           <a:p>
             <a:pPr lvl="4"/>
             <a:r>
-              <a:rPr lang="en-US"/>
+              <a:rPr lang="en-GB"/>
               <a:t>Fifth level</a:t>
             </a:r>
             <a:endParaRPr lang="en-US" dirty="0"/>
@@ -2758,8 +3095,8 @@
         </p:nvSpPr>
         <p:spPr>
           <a:xfrm>
-            <a:off x="891024" y="2002545"/>
-            <a:ext cx="2916079" cy="115031"/>
+            <a:off x="1361202" y="3337084"/>
+            <a:ext cx="4454843" cy="191691"/>
           </a:xfrm>
           <a:prstGeom prst="rect">
             <a:avLst/>
@@ -2769,7 +3106,7 @@
           <a:bodyPr vert="horz" lIns="91440" tIns="45720" rIns="91440" bIns="45720" rtlCol="0" anchor="ctr"/>
           <a:lstStyle>
             <a:lvl1pPr algn="l">
-              <a:defRPr sz="378">
+              <a:defRPr sz="630">
                 <a:solidFill>
                   <a:schemeClr val="tx1">
                     <a:tint val="75000"/>
@@ -2781,7 +3118,7 @@
           <a:p>
             <a:fld id="{BAE14841-EB75-4F4F-9DE8-73B3A903F4E0}" type="datetimeFigureOut">
               <a:rPr lang="en-GB" smtClean="0"/>
-              <a:t>28/09/2023</a:t>
+              <a:t>19/03/2024</a:t>
             </a:fld>
             <a:endParaRPr lang="en-GB"/>
           </a:p>
@@ -2799,8 +3136,8 @@
         </p:nvSpPr>
         <p:spPr>
           <a:xfrm>
-            <a:off x="4293116" y="2002545"/>
-            <a:ext cx="4374118" cy="115031"/>
+            <a:off x="6558518" y="3337084"/>
+            <a:ext cx="6682264" cy="191691"/>
           </a:xfrm>
           <a:prstGeom prst="rect">
             <a:avLst/>
@@ -2810,7 +3147,7 @@
           <a:bodyPr vert="horz" lIns="91440" tIns="45720" rIns="91440" bIns="45720" rtlCol="0" anchor="ctr"/>
           <a:lstStyle>
             <a:lvl1pPr algn="ctr">
-              <a:defRPr sz="378">
+              <a:defRPr sz="630">
                 <a:solidFill>
                   <a:schemeClr val="tx1">
                     <a:tint val="75000"/>
@@ -2836,8 +3173,8 @@
         </p:nvSpPr>
         <p:spPr>
           <a:xfrm>
-            <a:off x="9153247" y="2002545"/>
-            <a:ext cx="2916079" cy="115031"/>
+            <a:off x="13983255" y="3337084"/>
+            <a:ext cx="4454843" cy="191691"/>
           </a:xfrm>
           <a:prstGeom prst="rect">
             <a:avLst/>
@@ -2847,7 +3184,7 @@
           <a:bodyPr vert="horz" lIns="91440" tIns="45720" rIns="91440" bIns="45720" rtlCol="0" anchor="ctr"/>
           <a:lstStyle>
             <a:lvl1pPr algn="r">
-              <a:defRPr sz="378">
+              <a:defRPr sz="630">
                 <a:solidFill>
                   <a:schemeClr val="tx1">
                     <a:tint val="75000"/>
@@ -2868,27 +3205,27 @@
     </p:spTree>
     <p:extLst>
       <p:ext uri="{BB962C8B-B14F-4D97-AF65-F5344CB8AC3E}">
-        <p14:creationId xmlns:p14="http://schemas.microsoft.com/office/powerpoint/2010/main" val="2230530141"/>
+        <p14:creationId xmlns:p14="http://schemas.microsoft.com/office/powerpoint/2010/main" val="3209211200"/>
       </p:ext>
     </p:extLst>
   </p:cSld>
   <p:clrMap bg1="lt1" tx1="dk1" bg2="lt2" tx2="dk2" accent1="accent1" accent2="accent2" accent3="accent3" accent4="accent4" accent5="accent5" accent6="accent6" hlink="hlink" folHlink="folHlink"/>
   <p:sldLayoutIdLst>
-    <p:sldLayoutId id="2147483673" r:id="rId1"/>
-    <p:sldLayoutId id="2147483674" r:id="rId2"/>
-    <p:sldLayoutId id="2147483675" r:id="rId3"/>
-    <p:sldLayoutId id="2147483676" r:id="rId4"/>
-    <p:sldLayoutId id="2147483677" r:id="rId5"/>
-    <p:sldLayoutId id="2147483678" r:id="rId6"/>
-    <p:sldLayoutId id="2147483679" r:id="rId7"/>
-    <p:sldLayoutId id="2147483680" r:id="rId8"/>
-    <p:sldLayoutId id="2147483681" r:id="rId9"/>
-    <p:sldLayoutId id="2147483682" r:id="rId10"/>
-    <p:sldLayoutId id="2147483683" r:id="rId11"/>
+    <p:sldLayoutId id="2147483805" r:id="rId1"/>
+    <p:sldLayoutId id="2147483806" r:id="rId2"/>
+    <p:sldLayoutId id="2147483807" r:id="rId3"/>
+    <p:sldLayoutId id="2147483808" r:id="rId4"/>
+    <p:sldLayoutId id="2147483809" r:id="rId5"/>
+    <p:sldLayoutId id="2147483810" r:id="rId6"/>
+    <p:sldLayoutId id="2147483811" r:id="rId7"/>
+    <p:sldLayoutId id="2147483812" r:id="rId8"/>
+    <p:sldLayoutId id="2147483813" r:id="rId9"/>
+    <p:sldLayoutId id="2147483814" r:id="rId10"/>
+    <p:sldLayoutId id="2147483815" r:id="rId11"/>
   </p:sldLayoutIdLst>
   <p:txStyles>
     <p:titleStyle>
-      <a:lvl1pPr algn="l" defTabSz="288036" rtl="0" eaLnBrk="1" latinLnBrk="0" hangingPunct="1">
+      <a:lvl1pPr algn="l" defTabSz="480060" rtl="0" eaLnBrk="1" latinLnBrk="0" hangingPunct="1">
         <a:lnSpc>
           <a:spcPct val="90000"/>
         </a:lnSpc>
@@ -2896,7 +3233,7 @@
           <a:spcPct val="0"/>
         </a:spcBef>
         <a:buNone/>
-        <a:defRPr sz="1386" kern="1200">
+        <a:defRPr sz="2310" kern="1200">
           <a:solidFill>
             <a:schemeClr val="tx1"/>
           </a:solidFill>
@@ -2907,16 +3244,16 @@
       </a:lvl1pPr>
     </p:titleStyle>
     <p:bodyStyle>
-      <a:lvl1pPr marL="72009" indent="-72009" algn="l" defTabSz="288036" rtl="0" eaLnBrk="1" latinLnBrk="0" hangingPunct="1">
+      <a:lvl1pPr marL="120015" indent="-120015" algn="l" defTabSz="480060" rtl="0" eaLnBrk="1" latinLnBrk="0" hangingPunct="1">
         <a:lnSpc>
           <a:spcPct val="90000"/>
         </a:lnSpc>
         <a:spcBef>
-          <a:spcPts val="315"/>
+          <a:spcPts val="525"/>
         </a:spcBef>
         <a:buFont typeface="Arial" panose="020B0604020202020204" pitchFamily="34" charset="0"/>
         <a:buChar char="•"/>
-        <a:defRPr sz="882" kern="1200">
+        <a:defRPr sz="1470" kern="1200">
           <a:solidFill>
             <a:schemeClr val="tx1"/>
           </a:solidFill>
@@ -2925,16 +3262,16 @@
           <a:cs typeface="+mn-cs"/>
         </a:defRPr>
       </a:lvl1pPr>
-      <a:lvl2pPr marL="216027" indent="-72009" algn="l" defTabSz="288036" rtl="0" eaLnBrk="1" latinLnBrk="0" hangingPunct="1">
+      <a:lvl2pPr marL="360045" indent="-120015" algn="l" defTabSz="480060" rtl="0" eaLnBrk="1" latinLnBrk="0" hangingPunct="1">
         <a:lnSpc>
           <a:spcPct val="90000"/>
         </a:lnSpc>
         <a:spcBef>
-          <a:spcPts val="158"/>
+          <a:spcPts val="263"/>
         </a:spcBef>
         <a:buFont typeface="Arial" panose="020B0604020202020204" pitchFamily="34" charset="0"/>
         <a:buChar char="•"/>
-        <a:defRPr sz="756" kern="1200">
+        <a:defRPr sz="1260" kern="1200">
           <a:solidFill>
             <a:schemeClr val="tx1"/>
           </a:solidFill>
@@ -2943,16 +3280,16 @@
           <a:cs typeface="+mn-cs"/>
         </a:defRPr>
       </a:lvl2pPr>
-      <a:lvl3pPr marL="360045" indent="-72009" algn="l" defTabSz="288036" rtl="0" eaLnBrk="1" latinLnBrk="0" hangingPunct="1">
+      <a:lvl3pPr marL="600075" indent="-120015" algn="l" defTabSz="480060" rtl="0" eaLnBrk="1" latinLnBrk="0" hangingPunct="1">
         <a:lnSpc>
           <a:spcPct val="90000"/>
         </a:lnSpc>
         <a:spcBef>
-          <a:spcPts val="158"/>
+          <a:spcPts val="263"/>
         </a:spcBef>
         <a:buFont typeface="Arial" panose="020B0604020202020204" pitchFamily="34" charset="0"/>
         <a:buChar char="•"/>
-        <a:defRPr sz="630" kern="1200">
+        <a:defRPr sz="1050" kern="1200">
           <a:solidFill>
             <a:schemeClr val="tx1"/>
           </a:solidFill>
@@ -2961,16 +3298,16 @@
           <a:cs typeface="+mn-cs"/>
         </a:defRPr>
       </a:lvl3pPr>
-      <a:lvl4pPr marL="504063" indent="-72009" algn="l" defTabSz="288036" rtl="0" eaLnBrk="1" latinLnBrk="0" hangingPunct="1">
+      <a:lvl4pPr marL="840105" indent="-120015" algn="l" defTabSz="480060" rtl="0" eaLnBrk="1" latinLnBrk="0" hangingPunct="1">
         <a:lnSpc>
           <a:spcPct val="90000"/>
         </a:lnSpc>
         <a:spcBef>
-          <a:spcPts val="158"/>
+          <a:spcPts val="263"/>
         </a:spcBef>
         <a:buFont typeface="Arial" panose="020B0604020202020204" pitchFamily="34" charset="0"/>
         <a:buChar char="•"/>
-        <a:defRPr sz="567" kern="1200">
+        <a:defRPr sz="945" kern="1200">
           <a:solidFill>
             <a:schemeClr val="tx1"/>
           </a:solidFill>
@@ -2979,16 +3316,16 @@
           <a:cs typeface="+mn-cs"/>
         </a:defRPr>
       </a:lvl4pPr>
-      <a:lvl5pPr marL="648081" indent="-72009" algn="l" defTabSz="288036" rtl="0" eaLnBrk="1" latinLnBrk="0" hangingPunct="1">
+      <a:lvl5pPr marL="1080135" indent="-120015" algn="l" defTabSz="480060" rtl="0" eaLnBrk="1" latinLnBrk="0" hangingPunct="1">
         <a:lnSpc>
           <a:spcPct val="90000"/>
         </a:lnSpc>
         <a:spcBef>
-          <a:spcPts val="158"/>
+          <a:spcPts val="263"/>
         </a:spcBef>
         <a:buFont typeface="Arial" panose="020B0604020202020204" pitchFamily="34" charset="0"/>
         <a:buChar char="•"/>
-        <a:defRPr sz="567" kern="1200">
+        <a:defRPr sz="945" kern="1200">
           <a:solidFill>
             <a:schemeClr val="tx1"/>
           </a:solidFill>
@@ -2997,16 +3334,16 @@
           <a:cs typeface="+mn-cs"/>
         </a:defRPr>
       </a:lvl5pPr>
-      <a:lvl6pPr marL="792099" indent="-72009" algn="l" defTabSz="288036" rtl="0" eaLnBrk="1" latinLnBrk="0" hangingPunct="1">
+      <a:lvl6pPr marL="1320165" indent="-120015" algn="l" defTabSz="480060" rtl="0" eaLnBrk="1" latinLnBrk="0" hangingPunct="1">
         <a:lnSpc>
           <a:spcPct val="90000"/>
         </a:lnSpc>
         <a:spcBef>
-          <a:spcPts val="158"/>
+          <a:spcPts val="263"/>
         </a:spcBef>
         <a:buFont typeface="Arial" panose="020B0604020202020204" pitchFamily="34" charset="0"/>
         <a:buChar char="•"/>
-        <a:defRPr sz="567" kern="1200">
+        <a:defRPr sz="945" kern="1200">
           <a:solidFill>
             <a:schemeClr val="tx1"/>
           </a:solidFill>
@@ -3015,16 +3352,16 @@
           <a:cs typeface="+mn-cs"/>
         </a:defRPr>
       </a:lvl6pPr>
-      <a:lvl7pPr marL="936117" indent="-72009" algn="l" defTabSz="288036" rtl="0" eaLnBrk="1" latinLnBrk="0" hangingPunct="1">
+      <a:lvl7pPr marL="1560195" indent="-120015" algn="l" defTabSz="480060" rtl="0" eaLnBrk="1" latinLnBrk="0" hangingPunct="1">
         <a:lnSpc>
           <a:spcPct val="90000"/>
         </a:lnSpc>
         <a:spcBef>
-          <a:spcPts val="158"/>
+          <a:spcPts val="263"/>
         </a:spcBef>
         <a:buFont typeface="Arial" panose="020B0604020202020204" pitchFamily="34" charset="0"/>
         <a:buChar char="•"/>
-        <a:defRPr sz="567" kern="1200">
+        <a:defRPr sz="945" kern="1200">
           <a:solidFill>
             <a:schemeClr val="tx1"/>
           </a:solidFill>
@@ -3033,16 +3370,16 @@
           <a:cs typeface="+mn-cs"/>
         </a:defRPr>
       </a:lvl7pPr>
-      <a:lvl8pPr marL="1080135" indent="-72009" algn="l" defTabSz="288036" rtl="0" eaLnBrk="1" latinLnBrk="0" hangingPunct="1">
+      <a:lvl8pPr marL="1800225" indent="-120015" algn="l" defTabSz="480060" rtl="0" eaLnBrk="1" latinLnBrk="0" hangingPunct="1">
         <a:lnSpc>
           <a:spcPct val="90000"/>
         </a:lnSpc>
         <a:spcBef>
-          <a:spcPts val="158"/>
+          <a:spcPts val="263"/>
         </a:spcBef>
         <a:buFont typeface="Arial" panose="020B0604020202020204" pitchFamily="34" charset="0"/>
         <a:buChar char="•"/>
-        <a:defRPr sz="567" kern="1200">
+        <a:defRPr sz="945" kern="1200">
           <a:solidFill>
             <a:schemeClr val="tx1"/>
           </a:solidFill>
@@ -3051,16 +3388,16 @@
           <a:cs typeface="+mn-cs"/>
         </a:defRPr>
       </a:lvl8pPr>
-      <a:lvl9pPr marL="1224153" indent="-72009" algn="l" defTabSz="288036" rtl="0" eaLnBrk="1" latinLnBrk="0" hangingPunct="1">
+      <a:lvl9pPr marL="2040255" indent="-120015" algn="l" defTabSz="480060" rtl="0" eaLnBrk="1" latinLnBrk="0" hangingPunct="1">
         <a:lnSpc>
           <a:spcPct val="90000"/>
         </a:lnSpc>
         <a:spcBef>
-          <a:spcPts val="158"/>
+          <a:spcPts val="263"/>
         </a:spcBef>
         <a:buFont typeface="Arial" panose="020B0604020202020204" pitchFamily="34" charset="0"/>
         <a:buChar char="•"/>
-        <a:defRPr sz="567" kern="1200">
+        <a:defRPr sz="945" kern="1200">
           <a:solidFill>
             <a:schemeClr val="tx1"/>
           </a:solidFill>
@@ -3074,8 +3411,8 @@
       <a:defPPr>
         <a:defRPr lang="en-US"/>
       </a:defPPr>
-      <a:lvl1pPr marL="0" algn="l" defTabSz="288036" rtl="0" eaLnBrk="1" latinLnBrk="0" hangingPunct="1">
-        <a:defRPr sz="567" kern="1200">
+      <a:lvl1pPr marL="0" algn="l" defTabSz="480060" rtl="0" eaLnBrk="1" latinLnBrk="0" hangingPunct="1">
+        <a:defRPr sz="945" kern="1200">
           <a:solidFill>
             <a:schemeClr val="tx1"/>
           </a:solidFill>
@@ -3084,8 +3421,8 @@
           <a:cs typeface="+mn-cs"/>
         </a:defRPr>
       </a:lvl1pPr>
-      <a:lvl2pPr marL="144018" algn="l" defTabSz="288036" rtl="0" eaLnBrk="1" latinLnBrk="0" hangingPunct="1">
-        <a:defRPr sz="567" kern="1200">
+      <a:lvl2pPr marL="240030" algn="l" defTabSz="480060" rtl="0" eaLnBrk="1" latinLnBrk="0" hangingPunct="1">
+        <a:defRPr sz="945" kern="1200">
           <a:solidFill>
             <a:schemeClr val="tx1"/>
           </a:solidFill>
@@ -3094,8 +3431,8 @@
           <a:cs typeface="+mn-cs"/>
         </a:defRPr>
       </a:lvl2pPr>
-      <a:lvl3pPr marL="288036" algn="l" defTabSz="288036" rtl="0" eaLnBrk="1" latinLnBrk="0" hangingPunct="1">
-        <a:defRPr sz="567" kern="1200">
+      <a:lvl3pPr marL="480060" algn="l" defTabSz="480060" rtl="0" eaLnBrk="1" latinLnBrk="0" hangingPunct="1">
+        <a:defRPr sz="945" kern="1200">
           <a:solidFill>
             <a:schemeClr val="tx1"/>
           </a:solidFill>
@@ -3104,8 +3441,8 @@
           <a:cs typeface="+mn-cs"/>
         </a:defRPr>
       </a:lvl3pPr>
-      <a:lvl4pPr marL="432054" algn="l" defTabSz="288036" rtl="0" eaLnBrk="1" latinLnBrk="0" hangingPunct="1">
-        <a:defRPr sz="567" kern="1200">
+      <a:lvl4pPr marL="720090" algn="l" defTabSz="480060" rtl="0" eaLnBrk="1" latinLnBrk="0" hangingPunct="1">
+        <a:defRPr sz="945" kern="1200">
           <a:solidFill>
             <a:schemeClr val="tx1"/>
           </a:solidFill>
@@ -3114,8 +3451,8 @@
           <a:cs typeface="+mn-cs"/>
         </a:defRPr>
       </a:lvl4pPr>
-      <a:lvl5pPr marL="576072" algn="l" defTabSz="288036" rtl="0" eaLnBrk="1" latinLnBrk="0" hangingPunct="1">
-        <a:defRPr sz="567" kern="1200">
+      <a:lvl5pPr marL="960120" algn="l" defTabSz="480060" rtl="0" eaLnBrk="1" latinLnBrk="0" hangingPunct="1">
+        <a:defRPr sz="945" kern="1200">
           <a:solidFill>
             <a:schemeClr val="tx1"/>
           </a:solidFill>
@@ -3124,8 +3461,8 @@
           <a:cs typeface="+mn-cs"/>
         </a:defRPr>
       </a:lvl5pPr>
-      <a:lvl6pPr marL="720090" algn="l" defTabSz="288036" rtl="0" eaLnBrk="1" latinLnBrk="0" hangingPunct="1">
-        <a:defRPr sz="567" kern="1200">
+      <a:lvl6pPr marL="1200150" algn="l" defTabSz="480060" rtl="0" eaLnBrk="1" latinLnBrk="0" hangingPunct="1">
+        <a:defRPr sz="945" kern="1200">
           <a:solidFill>
             <a:schemeClr val="tx1"/>
           </a:solidFill>
@@ -3134,8 +3471,8 @@
           <a:cs typeface="+mn-cs"/>
         </a:defRPr>
       </a:lvl6pPr>
-      <a:lvl7pPr marL="864108" algn="l" defTabSz="288036" rtl="0" eaLnBrk="1" latinLnBrk="0" hangingPunct="1">
-        <a:defRPr sz="567" kern="1200">
+      <a:lvl7pPr marL="1440180" algn="l" defTabSz="480060" rtl="0" eaLnBrk="1" latinLnBrk="0" hangingPunct="1">
+        <a:defRPr sz="945" kern="1200">
           <a:solidFill>
             <a:schemeClr val="tx1"/>
           </a:solidFill>
@@ -3144,8 +3481,8 @@
           <a:cs typeface="+mn-cs"/>
         </a:defRPr>
       </a:lvl7pPr>
-      <a:lvl8pPr marL="1008126" algn="l" defTabSz="288036" rtl="0" eaLnBrk="1" latinLnBrk="0" hangingPunct="1">
-        <a:defRPr sz="567" kern="1200">
+      <a:lvl8pPr marL="1680210" algn="l" defTabSz="480060" rtl="0" eaLnBrk="1" latinLnBrk="0" hangingPunct="1">
+        <a:defRPr sz="945" kern="1200">
           <a:solidFill>
             <a:schemeClr val="tx1"/>
           </a:solidFill>
@@ -3154,8 +3491,8 @@
           <a:cs typeface="+mn-cs"/>
         </a:defRPr>
       </a:lvl8pPr>
-      <a:lvl9pPr marL="1152144" algn="l" defTabSz="288036" rtl="0" eaLnBrk="1" latinLnBrk="0" hangingPunct="1">
-        <a:defRPr sz="567" kern="1200">
+      <a:lvl9pPr marL="1920240" algn="l" defTabSz="480060" rtl="0" eaLnBrk="1" latinLnBrk="0" hangingPunct="1">
+        <a:defRPr sz="945" kern="1200">
           <a:solidFill>
             <a:schemeClr val="tx1"/>
           </a:solidFill>
@@ -3196,73 +3533,6 @@
       </p:grpSpPr>
       <p:pic>
         <p:nvPicPr>
-          <p:cNvPr id="1026" name="Picture 2" descr="4th East Grinstead Beavers/Cubs/Scouts | Facebook">
-            <a:extLst>
-              <a:ext uri="{FF2B5EF4-FFF2-40B4-BE49-F238E27FC236}">
-                <a16:creationId xmlns:a16="http://schemas.microsoft.com/office/drawing/2014/main" id="{484F419A-AAA8-BDB5-3106-DE37B6E29DDE}"/>
-              </a:ext>
-            </a:extLst>
-          </p:cNvPr>
-          <p:cNvPicPr>
-            <a:picLocks noChangeAspect="1" noChangeArrowheads="1"/>
-          </p:cNvPicPr>
-          <p:nvPr/>
-        </p:nvPicPr>
-        <p:blipFill>
-          <a:blip r:embed="rId2">
-            <a:extLst>
-              <a:ext uri="{28A0092B-C50C-407E-A947-70E740481C1C}">
-                <a14:useLocalDpi xmlns:a14="http://schemas.microsoft.com/office/drawing/2010/main" val="0"/>
-              </a:ext>
-            </a:extLst>
-          </a:blip>
-          <a:srcRect/>
-          <a:stretch>
-            <a:fillRect/>
-          </a:stretch>
-        </p:blipFill>
-        <p:spPr bwMode="auto">
-          <a:xfrm rot="21000000">
-            <a:off x="302225" y="269062"/>
-            <a:ext cx="1148005" cy="1622466"/>
-          </a:xfrm>
-          <a:prstGeom prst="rect">
-            <a:avLst/>
-          </a:prstGeom>
-          <a:solidFill>
-            <a:srgbClr val="FFFFFF">
-              <a:shade val="85000"/>
-            </a:srgbClr>
-          </a:solidFill>
-          <a:ln w="88900" cap="sq">
-            <a:solidFill>
-              <a:srgbClr val="FFFFFF"/>
-            </a:solidFill>
-            <a:miter lim="800000"/>
-          </a:ln>
-          <a:effectLst>
-            <a:outerShdw blurRad="55000" dist="18000" dir="5400000" algn="tl" rotWithShape="0">
-              <a:srgbClr val="000000">
-                <a:alpha val="40000"/>
-              </a:srgbClr>
-            </a:outerShdw>
-          </a:effectLst>
-          <a:scene3d>
-            <a:camera prst="orthographicFront"/>
-            <a:lightRig rig="twoPt" dir="t">
-              <a:rot lat="0" lon="0" rev="7200000"/>
-            </a:lightRig>
-          </a:scene3d>
-          <a:sp3d>
-            <a:bevelT w="25400" h="19050"/>
-            <a:contourClr>
-              <a:srgbClr val="FFFFFF"/>
-            </a:contourClr>
-          </a:sp3d>
-        </p:spPr>
-      </p:pic>
-      <p:pic>
-        <p:nvPicPr>
           <p:cNvPr id="7" name="Picture 6" descr="Several tents in a field&#10;&#10;Description automatically generated">
             <a:extLst>
               <a:ext uri="{FF2B5EF4-FFF2-40B4-BE49-F238E27FC236}">
@@ -3275,22 +3545,21 @@
           </p:cNvPicPr>
           <p:nvPr/>
         </p:nvPicPr>
-        <p:blipFill>
-          <a:blip r:embed="rId3">
+        <p:blipFill rotWithShape="1">
+          <a:blip r:embed="rId2">
             <a:extLst>
               <a:ext uri="{28A0092B-C50C-407E-A947-70E740481C1C}">
                 <a14:useLocalDpi xmlns:a14="http://schemas.microsoft.com/office/drawing/2010/main" val="0"/>
               </a:ext>
             </a:extLst>
           </a:blip>
-          <a:stretch>
-            <a:fillRect/>
-          </a:stretch>
+          <a:srcRect l="2247" r="22718"/>
+          <a:stretch/>
         </p:blipFill>
         <p:spPr>
-          <a:xfrm rot="20979043">
-            <a:off x="1936608" y="488008"/>
-            <a:ext cx="2105906" cy="1184572"/>
+          <a:xfrm rot="21000000">
+            <a:off x="14039748" y="630224"/>
+            <a:ext cx="3121515" cy="2340000"/>
           </a:xfrm>
           <a:prstGeom prst="rect">
             <a:avLst/>
@@ -3337,12 +3606,12 @@
             </a:extLst>
           </p:cNvPr>
           <p:cNvPicPr>
-            <a:picLocks noChangeAspect="1" noChangeArrowheads="1"/>
+            <a:picLocks noChangeAspect="1"/>
           </p:cNvPicPr>
           <p:nvPr/>
         </p:nvPicPr>
         <p:blipFill>
-          <a:blip r:embed="rId4">
+          <a:blip r:embed="rId3">
             <a:extLst>
               <a:ext uri="{28A0092B-C50C-407E-A947-70E740481C1C}">
                 <a14:useLocalDpi xmlns:a14="http://schemas.microsoft.com/office/drawing/2010/main" val="0"/>
@@ -3355,76 +3624,9 @@
           </a:stretch>
         </p:blipFill>
         <p:spPr bwMode="auto">
-          <a:xfrm rot="600000">
-            <a:off x="8871481" y="255645"/>
-            <a:ext cx="1237276" cy="1649299"/>
-          </a:xfrm>
-          <a:prstGeom prst="rect">
-            <a:avLst/>
-          </a:prstGeom>
-          <a:solidFill>
-            <a:srgbClr val="FFFFFF">
-              <a:shade val="85000"/>
-            </a:srgbClr>
-          </a:solidFill>
-          <a:ln w="88900" cap="sq">
-            <a:solidFill>
-              <a:srgbClr val="FFFFFF"/>
-            </a:solidFill>
-            <a:miter lim="800000"/>
-          </a:ln>
-          <a:effectLst>
-            <a:outerShdw blurRad="55000" dist="18000" dir="5400000" algn="tl" rotWithShape="0">
-              <a:srgbClr val="000000">
-                <a:alpha val="40000"/>
-              </a:srgbClr>
-            </a:outerShdw>
-          </a:effectLst>
-          <a:scene3d>
-            <a:camera prst="orthographicFront"/>
-            <a:lightRig rig="twoPt" dir="t">
-              <a:rot lat="0" lon="0" rev="7200000"/>
-            </a:lightRig>
-          </a:scene3d>
-          <a:sp3d>
-            <a:bevelT w="25400" h="19050"/>
-            <a:contourClr>
-              <a:srgbClr val="FFFFFF"/>
-            </a:contourClr>
-          </a:sp3d>
-        </p:spPr>
-      </p:pic>
-      <p:pic>
-        <p:nvPicPr>
-          <p:cNvPr id="1036" name="Picture 12">
-            <a:extLst>
-              <a:ext uri="{FF2B5EF4-FFF2-40B4-BE49-F238E27FC236}">
-                <a16:creationId xmlns:a16="http://schemas.microsoft.com/office/drawing/2014/main" id="{81B421AB-941E-2E88-CE86-B049DCF8460C}"/>
-              </a:ext>
-            </a:extLst>
-          </p:cNvPr>
-          <p:cNvPicPr>
-            <a:picLocks noChangeAspect="1" noChangeArrowheads="1"/>
-          </p:cNvPicPr>
-          <p:nvPr/>
-        </p:nvPicPr>
-        <p:blipFill>
-          <a:blip r:embed="rId5">
-            <a:extLst>
-              <a:ext uri="{28A0092B-C50C-407E-A947-70E740481C1C}">
-                <a14:useLocalDpi xmlns:a14="http://schemas.microsoft.com/office/drawing/2010/main" val="0"/>
-              </a:ext>
-            </a:extLst>
-          </a:blip>
-          <a:srcRect/>
-          <a:stretch>
-            <a:fillRect/>
-          </a:stretch>
-        </p:blipFill>
-        <p:spPr bwMode="auto">
-          <a:xfrm rot="600000">
-            <a:off x="10698196" y="596454"/>
-            <a:ext cx="2009229" cy="1129984"/>
+          <a:xfrm rot="21000000">
+            <a:off x="17545155" y="558476"/>
+            <a:ext cx="1890464" cy="2520000"/>
           </a:xfrm>
           <a:prstGeom prst="rect">
             <a:avLst/>
@@ -3476,6 +3678,109 @@
           <p:nvPr/>
         </p:nvPicPr>
         <p:blipFill>
+          <a:blip r:embed="rId4">
+            <a:extLst>
+              <a:ext uri="{28A0092B-C50C-407E-A947-70E740481C1C}">
+                <a14:useLocalDpi xmlns:a14="http://schemas.microsoft.com/office/drawing/2010/main" val="0"/>
+              </a:ext>
+            </a:extLst>
+          </a:blip>
+          <a:stretch>
+            <a:fillRect/>
+          </a:stretch>
+        </p:blipFill>
+        <p:spPr>
+          <a:xfrm>
+            <a:off x="6164869" y="696053"/>
+            <a:ext cx="7469564" cy="2244851"/>
+          </a:xfrm>
+          <a:prstGeom prst="rect">
+            <a:avLst/>
+          </a:prstGeom>
+        </p:spPr>
+      </p:pic>
+      <p:pic>
+        <p:nvPicPr>
+          <p:cNvPr id="1026" name="Picture 2" descr="4th East Grinstead Beavers/Cubs/Scouts | Facebook">
+            <a:extLst>
+              <a:ext uri="{FF2B5EF4-FFF2-40B4-BE49-F238E27FC236}">
+                <a16:creationId xmlns:a16="http://schemas.microsoft.com/office/drawing/2014/main" id="{484F419A-AAA8-BDB5-3106-DE37B6E29DDE}"/>
+              </a:ext>
+            </a:extLst>
+          </p:cNvPr>
+          <p:cNvPicPr>
+            <a:picLocks noChangeAspect="1" noChangeArrowheads="1"/>
+          </p:cNvPicPr>
+          <p:nvPr/>
+        </p:nvPicPr>
+        <p:blipFill>
+          <a:blip r:embed="rId5">
+            <a:extLst>
+              <a:ext uri="{28A0092B-C50C-407E-A947-70E740481C1C}">
+                <a14:useLocalDpi xmlns:a14="http://schemas.microsoft.com/office/drawing/2010/main" val="0"/>
+              </a:ext>
+            </a:extLst>
+          </a:blip>
+          <a:srcRect/>
+          <a:stretch>
+            <a:fillRect/>
+          </a:stretch>
+        </p:blipFill>
+        <p:spPr bwMode="auto">
+          <a:xfrm rot="600000">
+            <a:off x="3843434" y="540224"/>
+            <a:ext cx="1783070" cy="2520000"/>
+          </a:xfrm>
+          <a:prstGeom prst="rect">
+            <a:avLst/>
+          </a:prstGeom>
+          <a:solidFill>
+            <a:srgbClr val="FFFFFF">
+              <a:shade val="85000"/>
+            </a:srgbClr>
+          </a:solidFill>
+          <a:ln w="88900" cap="sq">
+            <a:solidFill>
+              <a:srgbClr val="FFFFFF"/>
+            </a:solidFill>
+            <a:miter lim="800000"/>
+          </a:ln>
+          <a:effectLst>
+            <a:outerShdw blurRad="55000" dist="18000" dir="5400000" algn="tl" rotWithShape="0">
+              <a:srgbClr val="000000">
+                <a:alpha val="40000"/>
+              </a:srgbClr>
+            </a:outerShdw>
+          </a:effectLst>
+          <a:scene3d>
+            <a:camera prst="orthographicFront"/>
+            <a:lightRig rig="twoPt" dir="t">
+              <a:rot lat="0" lon="0" rev="7200000"/>
+            </a:lightRig>
+          </a:scene3d>
+          <a:sp3d>
+            <a:bevelT w="25400" h="19050"/>
+            <a:contourClr>
+              <a:srgbClr val="FFFFFF"/>
+            </a:contourClr>
+          </a:sp3d>
+        </p:spPr>
+      </p:pic>
+      <p:pic>
+        <p:nvPicPr>
+          <p:cNvPr id="4" name="Picture 3" descr="A fire pit with a pot on it">
+            <a:extLst>
+              <a:ext uri="{FF2B5EF4-FFF2-40B4-BE49-F238E27FC236}">
+                <a16:creationId xmlns:a16="http://schemas.microsoft.com/office/drawing/2014/main" id="{82090C12-165B-0C0B-79DA-148E5E7E1C95}"/>
+              </a:ext>
+            </a:extLst>
+          </p:cNvPr>
+          <p:cNvPicPr>
+            <a:picLocks noChangeAspect="1"/>
+          </p:cNvPicPr>
+          <p:nvPr/>
+        </p:nvPicPr>
+        <p:blipFill>
           <a:blip r:embed="rId6">
             <a:extLst>
               <a:ext uri="{28A0092B-C50C-407E-A947-70E740481C1C}">
@@ -3488,13 +3793,43 @@
           </a:stretch>
         </p:blipFill>
         <p:spPr>
-          <a:xfrm>
-            <a:off x="4396743" y="475311"/>
-            <a:ext cx="4026042" cy="1209965"/>
+          <a:xfrm rot="600000">
+            <a:off x="338713" y="630356"/>
+            <a:ext cx="3119998" cy="2340000"/>
           </a:xfrm>
           <a:prstGeom prst="rect">
             <a:avLst/>
           </a:prstGeom>
+          <a:solidFill>
+            <a:srgbClr val="FFFFFF">
+              <a:shade val="85000"/>
+            </a:srgbClr>
+          </a:solidFill>
+          <a:ln w="88900" cap="sq">
+            <a:solidFill>
+              <a:srgbClr val="FFFFFF"/>
+            </a:solidFill>
+            <a:miter lim="800000"/>
+          </a:ln>
+          <a:effectLst>
+            <a:outerShdw blurRad="55000" dist="18000" dir="5400000" algn="tl" rotWithShape="0">
+              <a:srgbClr val="000000">
+                <a:alpha val="40000"/>
+              </a:srgbClr>
+            </a:outerShdw>
+          </a:effectLst>
+          <a:scene3d>
+            <a:camera prst="orthographicFront"/>
+            <a:lightRig rig="twoPt" dir="t">
+              <a:rot lat="0" lon="0" rev="7200000"/>
+            </a:lightRig>
+          </a:scene3d>
+          <a:sp3d>
+            <a:bevelT w="25400" h="19050"/>
+            <a:contourClr>
+              <a:srgbClr val="FFFFFF"/>
+            </a:contourClr>
+          </a:sp3d>
         </p:spPr>
       </p:pic>
     </p:spTree>
@@ -3511,9 +3846,9 @@
 </file>
 
 <file path=ppt/theme/theme1.xml><?xml version="1.0" encoding="utf-8"?>
-<a:theme xmlns:a="http://schemas.openxmlformats.org/drawingml/2006/main" name="Office Theme">
+<a:theme xmlns:a="http://schemas.openxmlformats.org/drawingml/2006/main" name="Office 2013 - 2022 Theme">
   <a:themeElements>
-    <a:clrScheme name="Office Theme">
+    <a:clrScheme name="Office 2013 - 2022 Theme">
       <a:dk1>
         <a:sysClr val="windowText" lastClr="000000"/>
       </a:dk1>
@@ -3551,7 +3886,7 @@
         <a:srgbClr val="954F72"/>
       </a:folHlink>
     </a:clrScheme>
-    <a:fontScheme name="Office Theme">
+    <a:fontScheme name="Office 2013 - 2022 Theme">
       <a:majorFont>
         <a:latin typeface="Calibri Light" panose="020F0302020204030204"/>
         <a:ea typeface=""/>
@@ -3623,7 +3958,7 @@
         <a:font script="Geor" typeface="Sylfaen"/>
       </a:minorFont>
     </a:fontScheme>
-    <a:fmtScheme name="Office Theme">
+    <a:fmtScheme name="Office 2013 - 2022 Theme">
       <a:fillStyleLst>
         <a:solidFill>
           <a:schemeClr val="phClr"/>
